--- a/hardware/PRESENTASI_HARDWARE_CIDP.pptx
+++ b/hardware/PRESENTASI_HARDWARE_CIDP.pptx
@@ -5,23 +5,23 @@
     <p:sldMasterId id="2147483648" r:id="rId1"/>
   </p:sldMasterIdLst>
   <p:sldIdLst>
-    <p:sldId id="256" r:id="rId7"/>
-    <p:sldId id="257" r:id="rId8"/>
-    <p:sldId id="258" r:id="rId9"/>
-    <p:sldId id="259" r:id="rId10"/>
-    <p:sldId id="260" r:id="rId11"/>
-    <p:sldId id="261" r:id="rId12"/>
-    <p:sldId id="262" r:id="rId13"/>
-    <p:sldId id="263" r:id="rId14"/>
-    <p:sldId id="264" r:id="rId15"/>
-    <p:sldId id="265" r:id="rId16"/>
-    <p:sldId id="266" r:id="rId17"/>
-    <p:sldId id="267" r:id="rId18"/>
-    <p:sldId id="268" r:id="rId19"/>
-    <p:sldId id="269" r:id="rId20"/>
-    <p:sldId id="270" r:id="rId21"/>
+    <p:sldId id="256" r:id="rId2"/>
+    <p:sldId id="257" r:id="rId3"/>
+    <p:sldId id="258" r:id="rId4"/>
+    <p:sldId id="259" r:id="rId5"/>
+    <p:sldId id="260" r:id="rId6"/>
+    <p:sldId id="261" r:id="rId7"/>
+    <p:sldId id="262" r:id="rId8"/>
+    <p:sldId id="263" r:id="rId9"/>
+    <p:sldId id="264" r:id="rId10"/>
+    <p:sldId id="265" r:id="rId11"/>
+    <p:sldId id="266" r:id="rId12"/>
+    <p:sldId id="267" r:id="rId13"/>
+    <p:sldId id="268" r:id="rId14"/>
+    <p:sldId id="269" r:id="rId15"/>
+    <p:sldId id="270" r:id="rId16"/>
   </p:sldIdLst>
-  <p:sldSz cx="12191695" cy="6858000" type="screen4x3"/>
+  <p:sldSz cx="12192000" cy="6858000"/>
   <p:notesSz cx="6858000" cy="9144000"/>
   <p:defaultTextStyle>
     <a:defPPr>
@@ -118,6 +118,22 @@
       </a:defRPr>
     </a:lvl9pPr>
   </p:defaultTextStyle>
+  <p:extLst>
+    <p:ext uri="{EFAFB233-063F-42B5-8137-9DF3F51BA10A}">
+      <p15:sldGuideLst xmlns:p15="http://schemas.microsoft.com/office/powerpoint/2012/main">
+        <p15:guide id="1" orient="horz" pos="2160">
+          <p15:clr>
+            <a:srgbClr val="A4A3A4"/>
+          </p15:clr>
+        </p15:guide>
+        <p15:guide id="2" pos="2880">
+          <p15:clr>
+            <a:srgbClr val="A4A3A4"/>
+          </p15:clr>
+        </p15:guide>
+      </p15:sldGuideLst>
+    </p:ext>
+  </p:extLst>
 </p:presentation>
 </file>
 
@@ -159,10 +175,9 @@
           <a:lstStyle/>
           <a:p>
             <a:r>
-              <a:rPr lang="en-US" smtClean="0"/>
+              <a:rPr lang="en-US"/>
               <a:t>Click to edit Master title style</a:t>
             </a:r>
-            <a:endParaRPr lang="en-US"/>
           </a:p>
         </p:txBody>
       </p:sp>
@@ -278,10 +293,9 @@
           </a:lstStyle>
           <a:p>
             <a:r>
-              <a:rPr lang="en-US" smtClean="0"/>
+              <a:rPr lang="en-US"/>
               <a:t>Click to edit Master subtitle style</a:t>
             </a:r>
-            <a:endParaRPr lang="en-US"/>
           </a:p>
         </p:txBody>
       </p:sp>
@@ -302,7 +316,7 @@
           <a:p>
             <a:fld id="{5BCAD085-E8A6-8845-BD4E-CB4CCA059FC4}" type="datetimeFigureOut">
               <a:rPr lang="en-US" smtClean="0"/>
-              <a:t>1/27/13</a:t>
+              <a:t>9/23/2026</a:t>
             </a:fld>
             <a:endParaRPr lang="en-US"/>
           </a:p>
@@ -396,10 +410,9 @@
           <a:lstStyle/>
           <a:p>
             <a:r>
-              <a:rPr lang="en-US" smtClean="0"/>
+              <a:rPr lang="en-US"/>
               <a:t>Click to edit Master title style</a:t>
             </a:r>
-            <a:endParaRPr lang="en-US"/>
           </a:p>
         </p:txBody>
       </p:sp>
@@ -420,38 +433,37 @@
           <a:p>
             <a:pPr lvl="0"/>
             <a:r>
-              <a:rPr lang="en-US" smtClean="0"/>
+              <a:rPr lang="en-US"/>
               <a:t>Click to edit Master text styles</a:t>
             </a:r>
           </a:p>
           <a:p>
             <a:pPr lvl="1"/>
             <a:r>
-              <a:rPr lang="en-US" smtClean="0"/>
+              <a:rPr lang="en-US"/>
               <a:t>Second level</a:t>
             </a:r>
           </a:p>
           <a:p>
             <a:pPr lvl="2"/>
             <a:r>
-              <a:rPr lang="en-US" smtClean="0"/>
+              <a:rPr lang="en-US"/>
               <a:t>Third level</a:t>
             </a:r>
           </a:p>
           <a:p>
             <a:pPr lvl="3"/>
             <a:r>
-              <a:rPr lang="en-US" smtClean="0"/>
+              <a:rPr lang="en-US"/>
               <a:t>Fourth level</a:t>
             </a:r>
           </a:p>
           <a:p>
             <a:pPr lvl="4"/>
             <a:r>
-              <a:rPr lang="en-US" smtClean="0"/>
+              <a:rPr lang="en-US"/>
               <a:t>Fifth level</a:t>
             </a:r>
-            <a:endParaRPr lang="en-US"/>
           </a:p>
         </p:txBody>
       </p:sp>
@@ -472,7 +484,7 @@
           <a:p>
             <a:fld id="{5BCAD085-E8A6-8845-BD4E-CB4CCA059FC4}" type="datetimeFigureOut">
               <a:rPr lang="en-US" smtClean="0"/>
-              <a:t>1/27/13</a:t>
+              <a:t>9/23/2026</a:t>
             </a:fld>
             <a:endParaRPr lang="en-US"/>
           </a:p>
@@ -571,10 +583,9 @@
           <a:lstStyle/>
           <a:p>
             <a:r>
-              <a:rPr lang="en-US" smtClean="0"/>
+              <a:rPr lang="en-US"/>
               <a:t>Click to edit Master title style</a:t>
             </a:r>
-            <a:endParaRPr lang="en-US"/>
           </a:p>
         </p:txBody>
       </p:sp>
@@ -600,38 +611,37 @@
           <a:p>
             <a:pPr lvl="0"/>
             <a:r>
-              <a:rPr lang="en-US" smtClean="0"/>
+              <a:rPr lang="en-US"/>
               <a:t>Click to edit Master text styles</a:t>
             </a:r>
           </a:p>
           <a:p>
             <a:pPr lvl="1"/>
             <a:r>
-              <a:rPr lang="en-US" smtClean="0"/>
+              <a:rPr lang="en-US"/>
               <a:t>Second level</a:t>
             </a:r>
           </a:p>
           <a:p>
             <a:pPr lvl="2"/>
             <a:r>
-              <a:rPr lang="en-US" smtClean="0"/>
+              <a:rPr lang="en-US"/>
               <a:t>Third level</a:t>
             </a:r>
           </a:p>
           <a:p>
             <a:pPr lvl="3"/>
             <a:r>
-              <a:rPr lang="en-US" smtClean="0"/>
+              <a:rPr lang="en-US"/>
               <a:t>Fourth level</a:t>
             </a:r>
           </a:p>
           <a:p>
             <a:pPr lvl="4"/>
             <a:r>
-              <a:rPr lang="en-US" smtClean="0"/>
+              <a:rPr lang="en-US"/>
               <a:t>Fifth level</a:t>
             </a:r>
-            <a:endParaRPr lang="en-US"/>
           </a:p>
         </p:txBody>
       </p:sp>
@@ -652,7 +662,7 @@
           <a:p>
             <a:fld id="{5BCAD085-E8A6-8845-BD4E-CB4CCA059FC4}" type="datetimeFigureOut">
               <a:rPr lang="en-US" smtClean="0"/>
-              <a:t>1/27/13</a:t>
+              <a:t>9/23/2026</a:t>
             </a:fld>
             <a:endParaRPr lang="en-US"/>
           </a:p>
@@ -746,10 +756,9 @@
           <a:lstStyle/>
           <a:p>
             <a:r>
-              <a:rPr lang="en-US" smtClean="0"/>
+              <a:rPr lang="en-US"/>
               <a:t>Click to edit Master title style</a:t>
             </a:r>
-            <a:endParaRPr lang="en-US"/>
           </a:p>
         </p:txBody>
       </p:sp>
@@ -770,38 +779,37 @@
           <a:p>
             <a:pPr lvl="0"/>
             <a:r>
-              <a:rPr lang="en-US" smtClean="0"/>
+              <a:rPr lang="en-US"/>
               <a:t>Click to edit Master text styles</a:t>
             </a:r>
           </a:p>
           <a:p>
             <a:pPr lvl="1"/>
             <a:r>
-              <a:rPr lang="en-US" smtClean="0"/>
+              <a:rPr lang="en-US"/>
               <a:t>Second level</a:t>
             </a:r>
           </a:p>
           <a:p>
             <a:pPr lvl="2"/>
             <a:r>
-              <a:rPr lang="en-US" smtClean="0"/>
+              <a:rPr lang="en-US"/>
               <a:t>Third level</a:t>
             </a:r>
           </a:p>
           <a:p>
             <a:pPr lvl="3"/>
             <a:r>
-              <a:rPr lang="en-US" smtClean="0"/>
+              <a:rPr lang="en-US"/>
               <a:t>Fourth level</a:t>
             </a:r>
           </a:p>
           <a:p>
             <a:pPr lvl="4"/>
             <a:r>
-              <a:rPr lang="en-US" smtClean="0"/>
+              <a:rPr lang="en-US"/>
               <a:t>Fifth level</a:t>
             </a:r>
-            <a:endParaRPr lang="en-US"/>
           </a:p>
         </p:txBody>
       </p:sp>
@@ -822,7 +830,7 @@
           <a:p>
             <a:fld id="{5BCAD085-E8A6-8845-BD4E-CB4CCA059FC4}" type="datetimeFigureOut">
               <a:rPr lang="en-US" smtClean="0"/>
-              <a:t>1/27/13</a:t>
+              <a:t>9/23/2026</a:t>
             </a:fld>
             <a:endParaRPr lang="en-US"/>
           </a:p>
@@ -925,10 +933,9 @@
           </a:lstStyle>
           <a:p>
             <a:r>
-              <a:rPr lang="en-US" smtClean="0"/>
+              <a:rPr lang="en-US"/>
               <a:t>Click to edit Master title style</a:t>
             </a:r>
-            <a:endParaRPr lang="en-US"/>
           </a:p>
         </p:txBody>
       </p:sp>
@@ -1045,7 +1052,7 @@
           <a:p>
             <a:pPr lvl="0"/>
             <a:r>
-              <a:rPr lang="en-US" smtClean="0"/>
+              <a:rPr lang="en-US"/>
               <a:t>Click to edit Master text styles</a:t>
             </a:r>
           </a:p>
@@ -1068,7 +1075,7 @@
           <a:p>
             <a:fld id="{5BCAD085-E8A6-8845-BD4E-CB4CCA059FC4}" type="datetimeFigureOut">
               <a:rPr lang="en-US" smtClean="0"/>
-              <a:t>1/27/13</a:t>
+              <a:t>9/23/2026</a:t>
             </a:fld>
             <a:endParaRPr lang="en-US"/>
           </a:p>
@@ -1162,10 +1169,9 @@
           <a:lstStyle/>
           <a:p>
             <a:r>
-              <a:rPr lang="en-US" smtClean="0"/>
+              <a:rPr lang="en-US"/>
               <a:t>Click to edit Master title style</a:t>
             </a:r>
-            <a:endParaRPr lang="en-US"/>
           </a:p>
         </p:txBody>
       </p:sp>
@@ -1219,38 +1225,37 @@
           <a:p>
             <a:pPr lvl="0"/>
             <a:r>
-              <a:rPr lang="en-US" smtClean="0"/>
+              <a:rPr lang="en-US"/>
               <a:t>Click to edit Master text styles</a:t>
             </a:r>
           </a:p>
           <a:p>
             <a:pPr lvl="1"/>
             <a:r>
-              <a:rPr lang="en-US" smtClean="0"/>
+              <a:rPr lang="en-US"/>
               <a:t>Second level</a:t>
             </a:r>
           </a:p>
           <a:p>
             <a:pPr lvl="2"/>
             <a:r>
-              <a:rPr lang="en-US" smtClean="0"/>
+              <a:rPr lang="en-US"/>
               <a:t>Third level</a:t>
             </a:r>
           </a:p>
           <a:p>
             <a:pPr lvl="3"/>
             <a:r>
-              <a:rPr lang="en-US" smtClean="0"/>
+              <a:rPr lang="en-US"/>
               <a:t>Fourth level</a:t>
             </a:r>
           </a:p>
           <a:p>
             <a:pPr lvl="4"/>
             <a:r>
-              <a:rPr lang="en-US" smtClean="0"/>
+              <a:rPr lang="en-US"/>
               <a:t>Fifth level</a:t>
             </a:r>
-            <a:endParaRPr lang="en-US"/>
           </a:p>
         </p:txBody>
       </p:sp>
@@ -1304,38 +1309,37 @@
           <a:p>
             <a:pPr lvl="0"/>
             <a:r>
-              <a:rPr lang="en-US" smtClean="0"/>
+              <a:rPr lang="en-US"/>
               <a:t>Click to edit Master text styles</a:t>
             </a:r>
           </a:p>
           <a:p>
             <a:pPr lvl="1"/>
             <a:r>
-              <a:rPr lang="en-US" smtClean="0"/>
+              <a:rPr lang="en-US"/>
               <a:t>Second level</a:t>
             </a:r>
           </a:p>
           <a:p>
             <a:pPr lvl="2"/>
             <a:r>
-              <a:rPr lang="en-US" smtClean="0"/>
+              <a:rPr lang="en-US"/>
               <a:t>Third level</a:t>
             </a:r>
           </a:p>
           <a:p>
             <a:pPr lvl="3"/>
             <a:r>
-              <a:rPr lang="en-US" smtClean="0"/>
+              <a:rPr lang="en-US"/>
               <a:t>Fourth level</a:t>
             </a:r>
           </a:p>
           <a:p>
             <a:pPr lvl="4"/>
             <a:r>
-              <a:rPr lang="en-US" smtClean="0"/>
+              <a:rPr lang="en-US"/>
               <a:t>Fifth level</a:t>
             </a:r>
-            <a:endParaRPr lang="en-US"/>
           </a:p>
         </p:txBody>
       </p:sp>
@@ -1356,7 +1360,7 @@
           <a:p>
             <a:fld id="{5BCAD085-E8A6-8845-BD4E-CB4CCA059FC4}" type="datetimeFigureOut">
               <a:rPr lang="en-US" smtClean="0"/>
-              <a:t>1/27/13</a:t>
+              <a:t>9/23/2026</a:t>
             </a:fld>
             <a:endParaRPr lang="en-US"/>
           </a:p>
@@ -1454,10 +1458,9 @@
           </a:lstStyle>
           <a:p>
             <a:r>
-              <a:rPr lang="en-US" smtClean="0"/>
+              <a:rPr lang="en-US"/>
               <a:t>Click to edit Master title style</a:t>
             </a:r>
-            <a:endParaRPr lang="en-US"/>
           </a:p>
         </p:txBody>
       </p:sp>
@@ -1520,7 +1523,7 @@
           <a:p>
             <a:pPr lvl="0"/>
             <a:r>
-              <a:rPr lang="en-US" smtClean="0"/>
+              <a:rPr lang="en-US"/>
               <a:t>Click to edit Master text styles</a:t>
             </a:r>
           </a:p>
@@ -1576,38 +1579,37 @@
           <a:p>
             <a:pPr lvl="0"/>
             <a:r>
-              <a:rPr lang="en-US" smtClean="0"/>
+              <a:rPr lang="en-US"/>
               <a:t>Click to edit Master text styles</a:t>
             </a:r>
           </a:p>
           <a:p>
             <a:pPr lvl="1"/>
             <a:r>
-              <a:rPr lang="en-US" smtClean="0"/>
+              <a:rPr lang="en-US"/>
               <a:t>Second level</a:t>
             </a:r>
           </a:p>
           <a:p>
             <a:pPr lvl="2"/>
             <a:r>
-              <a:rPr lang="en-US" smtClean="0"/>
+              <a:rPr lang="en-US"/>
               <a:t>Third level</a:t>
             </a:r>
           </a:p>
           <a:p>
             <a:pPr lvl="3"/>
             <a:r>
-              <a:rPr lang="en-US" smtClean="0"/>
+              <a:rPr lang="en-US"/>
               <a:t>Fourth level</a:t>
             </a:r>
           </a:p>
           <a:p>
             <a:pPr lvl="4"/>
             <a:r>
-              <a:rPr lang="en-US" smtClean="0"/>
+              <a:rPr lang="en-US"/>
               <a:t>Fifth level</a:t>
             </a:r>
-            <a:endParaRPr lang="en-US"/>
           </a:p>
         </p:txBody>
       </p:sp>
@@ -1670,7 +1672,7 @@
           <a:p>
             <a:pPr lvl="0"/>
             <a:r>
-              <a:rPr lang="en-US" smtClean="0"/>
+              <a:rPr lang="en-US"/>
               <a:t>Click to edit Master text styles</a:t>
             </a:r>
           </a:p>
@@ -1726,38 +1728,37 @@
           <a:p>
             <a:pPr lvl="0"/>
             <a:r>
-              <a:rPr lang="en-US" smtClean="0"/>
+              <a:rPr lang="en-US"/>
               <a:t>Click to edit Master text styles</a:t>
             </a:r>
           </a:p>
           <a:p>
             <a:pPr lvl="1"/>
             <a:r>
-              <a:rPr lang="en-US" smtClean="0"/>
+              <a:rPr lang="en-US"/>
               <a:t>Second level</a:t>
             </a:r>
           </a:p>
           <a:p>
             <a:pPr lvl="2"/>
             <a:r>
-              <a:rPr lang="en-US" smtClean="0"/>
+              <a:rPr lang="en-US"/>
               <a:t>Third level</a:t>
             </a:r>
           </a:p>
           <a:p>
             <a:pPr lvl="3"/>
             <a:r>
-              <a:rPr lang="en-US" smtClean="0"/>
+              <a:rPr lang="en-US"/>
               <a:t>Fourth level</a:t>
             </a:r>
           </a:p>
           <a:p>
             <a:pPr lvl="4"/>
             <a:r>
-              <a:rPr lang="en-US" smtClean="0"/>
+              <a:rPr lang="en-US"/>
               <a:t>Fifth level</a:t>
             </a:r>
-            <a:endParaRPr lang="en-US"/>
           </a:p>
         </p:txBody>
       </p:sp>
@@ -1778,7 +1779,7 @@
           <a:p>
             <a:fld id="{5BCAD085-E8A6-8845-BD4E-CB4CCA059FC4}" type="datetimeFigureOut">
               <a:rPr lang="en-US" smtClean="0"/>
-              <a:t>1/27/13</a:t>
+              <a:t>9/23/2026</a:t>
             </a:fld>
             <a:endParaRPr lang="en-US"/>
           </a:p>
@@ -1872,10 +1873,9 @@
           <a:lstStyle/>
           <a:p>
             <a:r>
-              <a:rPr lang="en-US" smtClean="0"/>
+              <a:rPr lang="en-US"/>
               <a:t>Click to edit Master title style</a:t>
             </a:r>
-            <a:endParaRPr lang="en-US"/>
           </a:p>
         </p:txBody>
       </p:sp>
@@ -1896,7 +1896,7 @@
           <a:p>
             <a:fld id="{5BCAD085-E8A6-8845-BD4E-CB4CCA059FC4}" type="datetimeFigureOut">
               <a:rPr lang="en-US" smtClean="0"/>
-              <a:t>1/27/13</a:t>
+              <a:t>9/23/2026</a:t>
             </a:fld>
             <a:endParaRPr lang="en-US"/>
           </a:p>
@@ -1991,7 +1991,7 @@
           <a:p>
             <a:fld id="{5BCAD085-E8A6-8845-BD4E-CB4CCA059FC4}" type="datetimeFigureOut">
               <a:rPr lang="en-US" smtClean="0"/>
-              <a:t>1/27/13</a:t>
+              <a:t>9/23/2026</a:t>
             </a:fld>
             <a:endParaRPr lang="en-US"/>
           </a:p>
@@ -2094,10 +2094,9 @@
           </a:lstStyle>
           <a:p>
             <a:r>
-              <a:rPr lang="en-US" smtClean="0"/>
+              <a:rPr lang="en-US"/>
               <a:t>Click to edit Master title style</a:t>
             </a:r>
-            <a:endParaRPr lang="en-US"/>
           </a:p>
         </p:txBody>
       </p:sp>
@@ -2151,38 +2150,37 @@
           <a:p>
             <a:pPr lvl="0"/>
             <a:r>
-              <a:rPr lang="en-US" smtClean="0"/>
+              <a:rPr lang="en-US"/>
               <a:t>Click to edit Master text styles</a:t>
             </a:r>
           </a:p>
           <a:p>
             <a:pPr lvl="1"/>
             <a:r>
-              <a:rPr lang="en-US" smtClean="0"/>
+              <a:rPr lang="en-US"/>
               <a:t>Second level</a:t>
             </a:r>
           </a:p>
           <a:p>
             <a:pPr lvl="2"/>
             <a:r>
-              <a:rPr lang="en-US" smtClean="0"/>
+              <a:rPr lang="en-US"/>
               <a:t>Third level</a:t>
             </a:r>
           </a:p>
           <a:p>
             <a:pPr lvl="3"/>
             <a:r>
-              <a:rPr lang="en-US" smtClean="0"/>
+              <a:rPr lang="en-US"/>
               <a:t>Fourth level</a:t>
             </a:r>
           </a:p>
           <a:p>
             <a:pPr lvl="4"/>
             <a:r>
-              <a:rPr lang="en-US" smtClean="0"/>
+              <a:rPr lang="en-US"/>
               <a:t>Fifth level</a:t>
             </a:r>
-            <a:endParaRPr lang="en-US"/>
           </a:p>
         </p:txBody>
       </p:sp>
@@ -2245,7 +2243,7 @@
           <a:p>
             <a:pPr lvl="0"/>
             <a:r>
-              <a:rPr lang="en-US" smtClean="0"/>
+              <a:rPr lang="en-US"/>
               <a:t>Click to edit Master text styles</a:t>
             </a:r>
           </a:p>
@@ -2268,7 +2266,7 @@
           <a:p>
             <a:fld id="{5BCAD085-E8A6-8845-BD4E-CB4CCA059FC4}" type="datetimeFigureOut">
               <a:rPr lang="en-US" smtClean="0"/>
-              <a:t>1/27/13</a:t>
+              <a:t>9/23/2026</a:t>
             </a:fld>
             <a:endParaRPr lang="en-US"/>
           </a:p>
@@ -2371,10 +2369,9 @@
           </a:lstStyle>
           <a:p>
             <a:r>
-              <a:rPr lang="en-US" smtClean="0"/>
+              <a:rPr lang="en-US"/>
               <a:t>Click to edit Master title style</a:t>
             </a:r>
-            <a:endParaRPr lang="en-US"/>
           </a:p>
         </p:txBody>
       </p:sp>
@@ -2498,7 +2495,7 @@
           <a:p>
             <a:pPr lvl="0"/>
             <a:r>
-              <a:rPr lang="en-US" smtClean="0"/>
+              <a:rPr lang="en-US"/>
               <a:t>Click to edit Master text styles</a:t>
             </a:r>
           </a:p>
@@ -2521,7 +2518,7 @@
           <a:p>
             <a:fld id="{5BCAD085-E8A6-8845-BD4E-CB4CCA059FC4}" type="datetimeFigureOut">
               <a:rPr lang="en-US" smtClean="0"/>
-              <a:t>1/27/13</a:t>
+              <a:t>9/23/2026</a:t>
             </a:fld>
             <a:endParaRPr lang="en-US"/>
           </a:p>
@@ -2630,10 +2627,9 @@
           <a:lstStyle/>
           <a:p>
             <a:r>
-              <a:rPr lang="en-US" smtClean="0"/>
+              <a:rPr lang="en-US"/>
               <a:t>Click to edit Master title style</a:t>
             </a:r>
-            <a:endParaRPr lang="en-US"/>
           </a:p>
         </p:txBody>
       </p:sp>
@@ -2664,38 +2660,37 @@
           <a:p>
             <a:pPr lvl="0"/>
             <a:r>
-              <a:rPr lang="en-US" smtClean="0"/>
+              <a:rPr lang="en-US"/>
               <a:t>Click to edit Master text styles</a:t>
             </a:r>
           </a:p>
           <a:p>
             <a:pPr lvl="1"/>
             <a:r>
-              <a:rPr lang="en-US" smtClean="0"/>
+              <a:rPr lang="en-US"/>
               <a:t>Second level</a:t>
             </a:r>
           </a:p>
           <a:p>
             <a:pPr lvl="2"/>
             <a:r>
-              <a:rPr lang="en-US" smtClean="0"/>
+              <a:rPr lang="en-US"/>
               <a:t>Third level</a:t>
             </a:r>
           </a:p>
           <a:p>
             <a:pPr lvl="3"/>
             <a:r>
-              <a:rPr lang="en-US" smtClean="0"/>
+              <a:rPr lang="en-US"/>
               <a:t>Fourth level</a:t>
             </a:r>
           </a:p>
           <a:p>
             <a:pPr lvl="4"/>
             <a:r>
-              <a:rPr lang="en-US" smtClean="0"/>
+              <a:rPr lang="en-US"/>
               <a:t>Fifth level</a:t>
             </a:r>
-            <a:endParaRPr lang="en-US"/>
           </a:p>
         </p:txBody>
       </p:sp>
@@ -2734,7 +2729,7 @@
           <a:p>
             <a:fld id="{5BCAD085-E8A6-8845-BD4E-CB4CCA059FC4}" type="datetimeFigureOut">
               <a:rPr lang="en-US" smtClean="0"/>
-              <a:t>1/27/13</a:t>
+              <a:t>9/23/2026</a:t>
             </a:fld>
             <a:endParaRPr lang="en-US"/>
           </a:p>
@@ -3093,7 +3088,7 @@
 </file>
 
 <file path=ppt/slides/slide1.xml><?xml version="1.0" encoding="utf-8"?>
-<p:sld xmlns:a="http://schemas.openxmlformats.org/drawingml/2006/main" xmlns:p="http://schemas.openxmlformats.org/presentationml/2006/main" xmlns:r="http://schemas.openxmlformats.org/officeDocument/2006/relationships">
+<p:sld xmlns:a="http://schemas.openxmlformats.org/drawingml/2006/main" xmlns:r="http://schemas.openxmlformats.org/officeDocument/2006/relationships" xmlns:p="http://schemas.openxmlformats.org/presentationml/2006/main">
   <p:cSld>
     <p:spTree>
       <p:nvGrpSpPr>
@@ -3101,7 +3096,14 @@
         <p:cNvGrpSpPr/>
         <p:nvPr/>
       </p:nvGrpSpPr>
-      <p:grpSpPr/>
+      <p:grpSpPr>
+        <a:xfrm>
+          <a:off x="0" y="0"/>
+          <a:ext cx="0" cy="0"/>
+          <a:chOff x="0" y="0"/>
+          <a:chExt cx="0" cy="0"/>
+        </a:xfrm>
+      </p:grpSpPr>
       <p:sp>
         <p:nvSpPr>
           <p:cNvPr id="2" name="Rectangle 1"/>
@@ -3110,7 +3112,7 @@
         </p:nvSpPr>
         <p:spPr>
           <a:xfrm>
-            <a:off x="0" y="0"/>
+            <a:off x="305" y="0"/>
             <a:ext cx="12191695" cy="6858000"/>
           </a:xfrm>
           <a:prstGeom prst="rect">
@@ -3142,6 +3144,7 @@
           <a:lstStyle/>
           <a:p>
             <a:pPr algn="ctr"/>
+            <a:endParaRPr/>
           </a:p>
         </p:txBody>
       </p:sp>
@@ -3153,8 +3156,8 @@
         </p:nvSpPr>
         <p:spPr>
           <a:xfrm>
-            <a:off x="731520" y="1097280"/>
-            <a:ext cx="137160" cy="4114800"/>
+            <a:off x="731520" y="457200"/>
+            <a:ext cx="109728" cy="5852160"/>
           </a:xfrm>
           <a:prstGeom prst="rect">
             <a:avLst/>
@@ -3185,6 +3188,7 @@
           <a:lstStyle/>
           <a:p>
             <a:pPr algn="ctr"/>
+            <a:endParaRPr/>
           </a:p>
         </p:txBody>
       </p:sp>
@@ -3196,8 +3200,8 @@
         </p:nvSpPr>
         <p:spPr>
           <a:xfrm>
-            <a:off x="1097280" y="1097280"/>
-            <a:ext cx="10058400" cy="4389120"/>
+            <a:off x="1005840" y="411480"/>
+            <a:ext cx="10424160" cy="430887"/>
           </a:xfrm>
           <a:prstGeom prst="rect">
             <a:avLst/>
@@ -3205,7 +3209,7 @@
           <a:noFill/>
         </p:spPr>
         <p:txBody>
-          <a:bodyPr wrap="square">
+          <a:bodyPr wrap="square" lIns="0" tIns="0" rIns="0" bIns="0">
             <a:spAutoFit/>
           </a:bodyPr>
           <a:lstStyle/>
@@ -3218,51 +3222,84 @@
               </a:defRPr>
             </a:pPr>
             <a:r>
-              <a:t>PROYEK YARD MANAGEMENT SYSTEM &amp; LOGISTIK INTERMODAL</a:t>
+              <a:rPr dirty="0"/>
+              <a:t>TOPIK 7 — INLAND CONTAINER DEPOT (ICD) &amp; DRY PORT MANAGEMENT</a:t>
             </a:r>
           </a:p>
           <a:p>
             <a:pPr>
               <a:spcBef>
-                <a:spcPts val="1200"/>
+                <a:spcPts val="600"/>
               </a:spcBef>
-              <a:defRPr sz="2800" b="1">
+              <a:defRPr sz="1100" b="1">
                 <a:solidFill>
-                  <a:srgbClr val="FFFFFF"/>
+                  <a:srgbClr val="F59E0B"/>
                 </a:solidFill>
               </a:defRPr>
             </a:pPr>
             <a:r>
-              <a:t>Arsitektur Perangkat Keras, Otomasi Telemetri Lapangan, &amp; Integrasi Dua Arah YMS–ERP Odoo</a:t>
-            </a:r>
-          </a:p>
-          <a:p>
-            <a:pPr>
-              <a:spcBef>
-                <a:spcPts val="1400"/>
-              </a:spcBef>
-              <a:defRPr sz="1400">
-                <a:solidFill>
-                  <a:srgbClr val="E2E8F0"/>
-                </a:solidFill>
-              </a:defRPr>
-            </a:pPr>
-            <a:r>
-              <a:t>Pemetaan 26 Hardware • 11 Perangkat Simulasi Postman JSON • 15 Perangkat Blueprint Fasilitas 35 Ha</a:t>
+              <a:rPr dirty="0"/>
+              <a:t>PROGRES MINGGU INI: PERANCANGAN ARSITEKTUR HARDWARE</a:t>
             </a:r>
           </a:p>
         </p:txBody>
       </p:sp>
       <p:sp>
         <p:nvSpPr>
-          <p:cNvPr id="5" name="TextBox 4"/>
+          <p:cNvPr id="5" name="Rounded Rectangle 4"/>
+          <p:cNvSpPr/>
+          <p:nvPr/>
+        </p:nvSpPr>
+        <p:spPr>
+          <a:xfrm>
+            <a:off x="1005840" y="2560320"/>
+            <a:ext cx="10424160" cy="3108960"/>
+          </a:xfrm>
+          <a:prstGeom prst="roundRect">
+            <a:avLst/>
+          </a:prstGeom>
+          <a:solidFill>
+            <a:srgbClr val="0F1E3C"/>
+          </a:solidFill>
+          <a:ln w="12700">
+            <a:solidFill>
+              <a:srgbClr val="1E3A6E"/>
+            </a:solidFill>
+          </a:ln>
+        </p:spPr>
+        <p:style>
+          <a:lnRef idx="1">
+            <a:schemeClr val="accent1"/>
+          </a:lnRef>
+          <a:fillRef idx="3">
+            <a:schemeClr val="accent1"/>
+          </a:fillRef>
+          <a:effectRef idx="2">
+            <a:schemeClr val="accent1"/>
+          </a:effectRef>
+          <a:fontRef idx="minor">
+            <a:schemeClr val="lt1"/>
+          </a:fontRef>
+        </p:style>
+        <p:txBody>
+          <a:bodyPr rtlCol="0" anchor="ctr"/>
+          <a:lstStyle/>
+          <a:p>
+            <a:pPr algn="ctr"/>
+            <a:endParaRPr/>
+          </a:p>
+        </p:txBody>
+      </p:sp>
+      <p:sp>
+        <p:nvSpPr>
+          <p:cNvPr id="6" name="TextBox 5"/>
           <p:cNvSpPr txBox="1"/>
           <p:nvPr/>
         </p:nvSpPr>
         <p:spPr>
           <a:xfrm>
-            <a:off x="1097280" y="4754880"/>
-            <a:ext cx="10058400" cy="1371600"/>
+            <a:off x="1188720" y="2651760"/>
+            <a:ext cx="10058400" cy="1023357"/>
           </a:xfrm>
           <a:prstGeom prst="rect">
             <a:avLst/>
@@ -3270,50 +3307,284 @@
           <a:noFill/>
         </p:spPr>
         <p:txBody>
-          <a:bodyPr wrap="square">
+          <a:bodyPr wrap="square" lIns="0" tIns="0" rIns="0" bIns="0">
             <a:spAutoFit/>
           </a:bodyPr>
           <a:lstStyle/>
           <a:p>
             <a:pPr>
-              <a:defRPr sz="1200" b="1">
+              <a:defRPr sz="1000" b="1">
                 <a:solidFill>
-                  <a:srgbClr val="FFFFFF"/>
+                  <a:srgbClr val="93C5FD"/>
                 </a:solidFill>
               </a:defRPr>
             </a:pPr>
             <a:r>
-              <a:t>Presenter: Armansyah Muchtarrom  |  Role: Hardware &amp; Infrastructure Specialist</a:t>
+              <a:rPr dirty="0"/>
+              <a:t>CONCLUSION SUPPLY CHAIN CONSULTANT:</a:t>
             </a:r>
           </a:p>
           <a:p>
             <a:pPr>
               <a:spcBef>
-                <a:spcPts val="400"/>
+                <a:spcPts val="300"/>
               </a:spcBef>
-              <a:defRPr sz="1100">
+              <a:defRPr sz="900">
+                <a:solidFill>
+                  <a:srgbClr val="E2E8F0"/>
+                </a:solidFill>
+              </a:defRPr>
+            </a:pPr>
+            <a:r>
+              <a:rPr dirty="0"/>
+              <a:t>• 1. Zulfikar </a:t>
+            </a:r>
+            <a:r>
+              <a:rPr dirty="0" err="1"/>
+              <a:t>Jafarudin</a:t>
+            </a:r>
+            <a:r>
+              <a:rPr dirty="0"/>
+              <a:t> Fatah (24D507001001) — Lead System Architect (</a:t>
+            </a:r>
+            <a:r>
+              <a:rPr dirty="0" err="1"/>
+              <a:t>Ketua</a:t>
+            </a:r>
+            <a:r>
+              <a:rPr dirty="0"/>
+              <a:t> Tim)</a:t>
+            </a:r>
+            <a:br>
+              <a:rPr dirty="0"/>
+            </a:br>
+            <a:r>
+              <a:rPr dirty="0"/>
+              <a:t>• 2. Armansyah Muchtarrom (24D507001010) — Hardware &amp; Infrastructure Specialist (Presenter)</a:t>
+            </a:r>
+            <a:br>
+              <a:rPr dirty="0"/>
+            </a:br>
+            <a:r>
+              <a:rPr dirty="0"/>
+              <a:t>• 3. </a:t>
+            </a:r>
+            <a:r>
+              <a:rPr dirty="0" err="1"/>
+              <a:t>Afriansayah</a:t>
+            </a:r>
+            <a:r>
+              <a:rPr dirty="0"/>
+              <a:t> </a:t>
+            </a:r>
+            <a:r>
+              <a:rPr dirty="0" err="1"/>
+              <a:t>Ayubi</a:t>
+            </a:r>
+            <a:r>
+              <a:rPr dirty="0"/>
+              <a:t> (24D507001026) — Software &amp; ERP Process Specialist</a:t>
+            </a:r>
+            <a:br>
+              <a:rPr dirty="0"/>
+            </a:br>
+            <a:r>
+              <a:rPr dirty="0"/>
+              <a:t>• 4. Juan Gamaliel (24D507001016) — Data Integration Specialist</a:t>
+            </a:r>
+            <a:br>
+              <a:rPr dirty="0"/>
+            </a:br>
+            <a:r>
+              <a:rPr dirty="0"/>
+              <a:t>• 5. Naufal Andika </a:t>
+            </a:r>
+            <a:r>
+              <a:rPr dirty="0" err="1"/>
+              <a:t>Heditya</a:t>
+            </a:r>
+            <a:r>
+              <a:rPr dirty="0"/>
+              <a:t> (24D507001012) — Business Analyst &amp; QA Specialist</a:t>
+            </a:r>
+            <a:br>
+              <a:rPr dirty="0"/>
+            </a:br>
+            <a:r>
+              <a:rPr dirty="0"/>
+              <a:t>   </a:t>
+            </a:r>
+          </a:p>
+        </p:txBody>
+      </p:sp>
+      <p:sp>
+        <p:nvSpPr>
+          <p:cNvPr id="7" name="TextBox 6"/>
+          <p:cNvSpPr txBox="1"/>
+          <p:nvPr/>
+        </p:nvSpPr>
+        <p:spPr>
+          <a:xfrm>
+            <a:off x="1005840" y="5806440"/>
+            <a:ext cx="10424160" cy="548640"/>
+          </a:xfrm>
+          <a:prstGeom prst="rect">
+            <a:avLst/>
+          </a:prstGeom>
+          <a:noFill/>
+        </p:spPr>
+        <p:txBody>
+          <a:bodyPr wrap="square" lIns="0" tIns="0" rIns="0" bIns="0">
+            <a:spAutoFit/>
+          </a:bodyPr>
+          <a:lstStyle/>
+          <a:p>
+            <a:pPr>
+              <a:defRPr sz="1000" b="1">
                 <a:solidFill>
                   <a:srgbClr val="CBD5E1"/>
                 </a:solidFill>
               </a:defRPr>
             </a:pPr>
             <a:r>
-              <a:t>Mata Kuliah: Teknologi &amp; Perangkat Lunak Logistik  •  Dosen Pengampu: Dr. Tigor Franky, S.T., M.T.</a:t>
+              <a:rPr dirty="0"/>
+              <a:t>Mata </a:t>
+            </a:r>
+            <a:r>
+              <a:rPr dirty="0" err="1"/>
+              <a:t>Kuliah</a:t>
+            </a:r>
+            <a:r>
+              <a:rPr dirty="0"/>
+              <a:t>: </a:t>
+            </a:r>
+            <a:r>
+              <a:rPr dirty="0" err="1"/>
+              <a:t>Teknologi</a:t>
+            </a:r>
+            <a:r>
+              <a:rPr dirty="0"/>
+              <a:t> dan </a:t>
+            </a:r>
+            <a:r>
+              <a:rPr dirty="0" err="1"/>
+              <a:t>Perangkat</a:t>
+            </a:r>
+            <a:r>
+              <a:rPr dirty="0"/>
+              <a:t> </a:t>
+            </a:r>
+            <a:r>
+              <a:rPr dirty="0" err="1"/>
+              <a:t>Lunak</a:t>
+            </a:r>
+            <a:r>
+              <a:rPr dirty="0"/>
+              <a:t> </a:t>
+            </a:r>
+            <a:r>
+              <a:rPr dirty="0" err="1"/>
+              <a:t>Logistik</a:t>
+            </a:r>
+            <a:r>
+              <a:rPr dirty="0"/>
+              <a:t>  •  </a:t>
+            </a:r>
+            <a:r>
+              <a:rPr dirty="0" err="1"/>
+              <a:t>Dosen</a:t>
+            </a:r>
+            <a:r>
+              <a:rPr dirty="0"/>
+              <a:t> </a:t>
+            </a:r>
+            <a:r>
+              <a:rPr dirty="0" err="1"/>
+              <a:t>Pengampu</a:t>
+            </a:r>
+            <a:r>
+              <a:rPr dirty="0"/>
+              <a:t>: Dr. </a:t>
+            </a:r>
+            <a:r>
+              <a:rPr dirty="0" err="1"/>
+              <a:t>Tigor</a:t>
+            </a:r>
+            <a:r>
+              <a:rPr dirty="0"/>
+              <a:t> Franky, S.T., M.T.</a:t>
             </a:r>
           </a:p>
           <a:p>
             <a:pPr>
               <a:spcBef>
-                <a:spcPts val="400"/>
+                <a:spcPts val="200"/>
               </a:spcBef>
-              <a:defRPr sz="1000">
+              <a:defRPr sz="950">
                 <a:solidFill>
                   <a:srgbClr val="94A3B8"/>
                 </a:solidFill>
               </a:defRPr>
             </a:pPr>
             <a:r>
-              <a:t>Institut Transportasi dan Logistik (ITL) Trisakti  •  Conclusion Supply Chain Consultant  •  September 2026</a:t>
+              <a:rPr dirty="0"/>
+              <a:t>Program </a:t>
+            </a:r>
+            <a:r>
+              <a:rPr dirty="0" err="1"/>
+              <a:t>Studi</a:t>
+            </a:r>
+            <a:r>
+              <a:rPr dirty="0"/>
+              <a:t> </a:t>
+            </a:r>
+            <a:r>
+              <a:rPr dirty="0" err="1"/>
+              <a:t>Manajemen</a:t>
+            </a:r>
+            <a:r>
+              <a:rPr dirty="0"/>
+              <a:t> </a:t>
+            </a:r>
+            <a:r>
+              <a:rPr dirty="0" err="1"/>
+              <a:t>Logistik</a:t>
+            </a:r>
+            <a:r>
+              <a:rPr dirty="0"/>
+              <a:t>  •  </a:t>
+            </a:r>
+            <a:r>
+              <a:rPr dirty="0" err="1"/>
+              <a:t>Institut</a:t>
+            </a:r>
+            <a:r>
+              <a:rPr dirty="0"/>
+              <a:t> </a:t>
+            </a:r>
+            <a:r>
+              <a:rPr dirty="0" err="1"/>
+              <a:t>Transportasi</a:t>
+            </a:r>
+            <a:r>
+              <a:rPr dirty="0"/>
+              <a:t> dan </a:t>
+            </a:r>
+            <a:r>
+              <a:rPr dirty="0" err="1"/>
+              <a:t>Logistik</a:t>
+            </a:r>
+            <a:r>
+              <a:rPr dirty="0"/>
+              <a:t> (ITL) </a:t>
+            </a:r>
+            <a:r>
+              <a:rPr dirty="0" err="1"/>
+              <a:t>Trisakti</a:t>
+            </a:r>
+            <a:r>
+              <a:rPr dirty="0"/>
+              <a:t>  •  September 2026</a:t>
             </a:r>
           </a:p>
         </p:txBody>
@@ -3327,7 +3598,7 @@
 </file>
 
 <file path=ppt/slides/slide10.xml><?xml version="1.0" encoding="utf-8"?>
-<p:sld xmlns:a="http://schemas.openxmlformats.org/drawingml/2006/main" xmlns:p="http://schemas.openxmlformats.org/presentationml/2006/main" xmlns:r="http://schemas.openxmlformats.org/officeDocument/2006/relationships">
+<p:sld xmlns:a="http://schemas.openxmlformats.org/drawingml/2006/main" xmlns:r="http://schemas.openxmlformats.org/officeDocument/2006/relationships" xmlns:p="http://schemas.openxmlformats.org/presentationml/2006/main">
   <p:cSld>
     <p:spTree>
       <p:nvGrpSpPr>
@@ -3335,7 +3606,14 @@
         <p:cNvGrpSpPr/>
         <p:nvPr/>
       </p:nvGrpSpPr>
-      <p:grpSpPr/>
+      <p:grpSpPr>
+        <a:xfrm>
+          <a:off x="0" y="0"/>
+          <a:ext cx="0" cy="0"/>
+          <a:chOff x="0" y="0"/>
+          <a:chExt cx="0" cy="0"/>
+        </a:xfrm>
+      </p:grpSpPr>
       <p:sp>
         <p:nvSpPr>
           <p:cNvPr id="2" name="TextBox 1"/>
@@ -3366,7 +3644,7 @@
               </a:defRPr>
             </a:pPr>
             <a:r>
-              <a:t>CONCLUSION INTERMODAL DRY PORT (CIDP) 35 HA</a:t>
+              <a:t>TOPIK 7: INLAND CONTAINER DEPOT (ICD) &amp; DRY PORT MANAGEMENT</a:t>
             </a:r>
           </a:p>
           <a:p>
@@ -3416,7 +3694,7 @@
               </a:defRPr>
             </a:pPr>
             <a:r>
-              <a:t>Armansyah Muchtarrom — Hardware &amp; Infrastructure Specialist | CIDP 35 Ha YMS &amp; ERP Odoo                    Slide 10 of 15</a:t>
+              <a:t>Armansyah Muchtarrom — Hardware Specialist | Topik 7: ICD &amp; Dry Port Management (CIDP 35 Ha)                    Slide 10 of 15</a:t>
             </a:r>
           </a:p>
         </p:txBody>
@@ -3463,6 +3741,7 @@
           <a:lstStyle/>
           <a:p>
             <a:pPr algn="ctr"/>
+            <a:endParaRPr/>
           </a:p>
         </p:txBody>
       </p:sp>
@@ -3573,6 +3852,7 @@
           <a:lstStyle/>
           <a:p>
             <a:pPr algn="ctr"/>
+            <a:endParaRPr/>
           </a:p>
         </p:txBody>
       </p:sp>
@@ -3683,6 +3963,7 @@
           <a:lstStyle/>
           <a:p>
             <a:pPr algn="ctr"/>
+            <a:endParaRPr/>
           </a:p>
         </p:txBody>
       </p:sp>
@@ -3793,6 +4074,7 @@
           <a:lstStyle/>
           <a:p>
             <a:pPr algn="ctr"/>
+            <a:endParaRPr/>
           </a:p>
         </p:txBody>
       </p:sp>
@@ -3870,7 +4152,7 @@
 </file>
 
 <file path=ppt/slides/slide11.xml><?xml version="1.0" encoding="utf-8"?>
-<p:sld xmlns:a="http://schemas.openxmlformats.org/drawingml/2006/main" xmlns:p="http://schemas.openxmlformats.org/presentationml/2006/main" xmlns:r="http://schemas.openxmlformats.org/officeDocument/2006/relationships">
+<p:sld xmlns:a="http://schemas.openxmlformats.org/drawingml/2006/main" xmlns:r="http://schemas.openxmlformats.org/officeDocument/2006/relationships" xmlns:p="http://schemas.openxmlformats.org/presentationml/2006/main">
   <p:cSld>
     <p:spTree>
       <p:nvGrpSpPr>
@@ -3878,7 +4160,14 @@
         <p:cNvGrpSpPr/>
         <p:nvPr/>
       </p:nvGrpSpPr>
-      <p:grpSpPr/>
+      <p:grpSpPr>
+        <a:xfrm>
+          <a:off x="0" y="0"/>
+          <a:ext cx="0" cy="0"/>
+          <a:chOff x="0" y="0"/>
+          <a:chExt cx="0" cy="0"/>
+        </a:xfrm>
+      </p:grpSpPr>
       <p:sp>
         <p:nvSpPr>
           <p:cNvPr id="2" name="TextBox 1"/>
@@ -3959,7 +4248,7 @@
               </a:defRPr>
             </a:pPr>
             <a:r>
-              <a:t>Armansyah Muchtarrom — Hardware &amp; Infrastructure Specialist | CIDP 35 Ha YMS &amp; ERP Odoo                    Slide 11 of 15</a:t>
+              <a:t>Armansyah Muchtarrom — Hardware Specialist | Topik 7: ICD &amp; Dry Port Management (CIDP 35 Ha)                    Slide 11 of 15</a:t>
             </a:r>
           </a:p>
         </p:txBody>
@@ -4006,6 +4295,7 @@
           <a:lstStyle/>
           <a:p>
             <a:pPr algn="ctr"/>
+            <a:endParaRPr/>
           </a:p>
         </p:txBody>
       </p:sp>
@@ -4140,6 +4430,7 @@
           <a:lstStyle/>
           <a:p>
             <a:pPr algn="ctr"/>
+            <a:endParaRPr/>
           </a:p>
         </p:txBody>
       </p:sp>
@@ -4274,6 +4565,7 @@
           <a:lstStyle/>
           <a:p>
             <a:pPr algn="ctr"/>
+            <a:endParaRPr/>
           </a:p>
         </p:txBody>
       </p:sp>
@@ -4375,7 +4667,7 @@
 </file>
 
 <file path=ppt/slides/slide12.xml><?xml version="1.0" encoding="utf-8"?>
-<p:sld xmlns:a="http://schemas.openxmlformats.org/drawingml/2006/main" xmlns:p="http://schemas.openxmlformats.org/presentationml/2006/main" xmlns:r="http://schemas.openxmlformats.org/officeDocument/2006/relationships">
+<p:sld xmlns:a="http://schemas.openxmlformats.org/drawingml/2006/main" xmlns:r="http://schemas.openxmlformats.org/officeDocument/2006/relationships" xmlns:p="http://schemas.openxmlformats.org/presentationml/2006/main">
   <p:cSld>
     <p:spTree>
       <p:nvGrpSpPr>
@@ -4383,7 +4675,14 @@
         <p:cNvGrpSpPr/>
         <p:nvPr/>
       </p:nvGrpSpPr>
-      <p:grpSpPr/>
+      <p:grpSpPr>
+        <a:xfrm>
+          <a:off x="0" y="0"/>
+          <a:ext cx="0" cy="0"/>
+          <a:chOff x="0" y="0"/>
+          <a:chExt cx="0" cy="0"/>
+        </a:xfrm>
+      </p:grpSpPr>
       <p:sp>
         <p:nvSpPr>
           <p:cNvPr id="2" name="TextBox 1"/>
@@ -4464,7 +4763,7 @@
               </a:defRPr>
             </a:pPr>
             <a:r>
-              <a:t>Armansyah Muchtarrom — Hardware &amp; Infrastructure Specialist | CIDP 35 Ha YMS &amp; ERP Odoo                    Slide 12 of 15</a:t>
+              <a:t>Armansyah Muchtarrom — Hardware Specialist | Topik 7: ICD &amp; Dry Port Management (CIDP 35 Ha)                    Slide 12 of 15</a:t>
             </a:r>
           </a:p>
         </p:txBody>
@@ -4511,6 +4810,7 @@
           <a:lstStyle/>
           <a:p>
             <a:pPr algn="ctr"/>
+            <a:endParaRPr/>
           </a:p>
         </p:txBody>
       </p:sp>
@@ -4645,6 +4945,7 @@
           <a:lstStyle/>
           <a:p>
             <a:pPr algn="ctr"/>
+            <a:endParaRPr/>
           </a:p>
         </p:txBody>
       </p:sp>
@@ -4779,6 +5080,7 @@
           <a:lstStyle/>
           <a:p>
             <a:pPr algn="ctr"/>
+            <a:endParaRPr/>
           </a:p>
         </p:txBody>
       </p:sp>
@@ -4880,7 +5182,7 @@
 </file>
 
 <file path=ppt/slides/slide13.xml><?xml version="1.0" encoding="utf-8"?>
-<p:sld xmlns:a="http://schemas.openxmlformats.org/drawingml/2006/main" xmlns:p="http://schemas.openxmlformats.org/presentationml/2006/main" xmlns:r="http://schemas.openxmlformats.org/officeDocument/2006/relationships">
+<p:sld xmlns:a="http://schemas.openxmlformats.org/drawingml/2006/main" xmlns:r="http://schemas.openxmlformats.org/officeDocument/2006/relationships" xmlns:p="http://schemas.openxmlformats.org/presentationml/2006/main">
   <p:cSld>
     <p:spTree>
       <p:nvGrpSpPr>
@@ -4888,7 +5190,14 @@
         <p:cNvGrpSpPr/>
         <p:nvPr/>
       </p:nvGrpSpPr>
-      <p:grpSpPr/>
+      <p:grpSpPr>
+        <a:xfrm>
+          <a:off x="0" y="0"/>
+          <a:ext cx="0" cy="0"/>
+          <a:chOff x="0" y="0"/>
+          <a:chExt cx="0" cy="0"/>
+        </a:xfrm>
+      </p:grpSpPr>
       <p:sp>
         <p:nvSpPr>
           <p:cNvPr id="2" name="TextBox 1"/>
@@ -4969,7 +5278,7 @@
               </a:defRPr>
             </a:pPr>
             <a:r>
-              <a:t>Armansyah Muchtarrom — Hardware &amp; Infrastructure Specialist | CIDP 35 Ha YMS &amp; ERP Odoo                    Slide 13 of 15</a:t>
+              <a:t>Armansyah Muchtarrom — Hardware Specialist | Topik 7: ICD &amp; Dry Port Management (CIDP 35 Ha)                    Slide 13 of 15</a:t>
             </a:r>
           </a:p>
         </p:txBody>
@@ -5016,6 +5325,7 @@
           <a:lstStyle/>
           <a:p>
             <a:pPr algn="ctr"/>
+            <a:endParaRPr/>
           </a:p>
         </p:txBody>
       </p:sp>
@@ -5150,6 +5460,7 @@
           <a:lstStyle/>
           <a:p>
             <a:pPr algn="ctr"/>
+            <a:endParaRPr/>
           </a:p>
         </p:txBody>
       </p:sp>
@@ -5264,7 +5575,7 @@
 </file>
 
 <file path=ppt/slides/slide14.xml><?xml version="1.0" encoding="utf-8"?>
-<p:sld xmlns:a="http://schemas.openxmlformats.org/drawingml/2006/main" xmlns:p="http://schemas.openxmlformats.org/presentationml/2006/main" xmlns:r="http://schemas.openxmlformats.org/officeDocument/2006/relationships">
+<p:sld xmlns:a="http://schemas.openxmlformats.org/drawingml/2006/main" xmlns:r="http://schemas.openxmlformats.org/officeDocument/2006/relationships" xmlns:p="http://schemas.openxmlformats.org/presentationml/2006/main">
   <p:cSld>
     <p:spTree>
       <p:nvGrpSpPr>
@@ -5272,7 +5583,14 @@
         <p:cNvGrpSpPr/>
         <p:nvPr/>
       </p:nvGrpSpPr>
-      <p:grpSpPr/>
+      <p:grpSpPr>
+        <a:xfrm>
+          <a:off x="0" y="0"/>
+          <a:ext cx="0" cy="0"/>
+          <a:chOff x="0" y="0"/>
+          <a:chExt cx="0" cy="0"/>
+        </a:xfrm>
+      </p:grpSpPr>
       <p:sp>
         <p:nvSpPr>
           <p:cNvPr id="2" name="TextBox 1"/>
@@ -5353,7 +5671,7 @@
               </a:defRPr>
             </a:pPr>
             <a:r>
-              <a:t>Armansyah Muchtarrom — Hardware &amp; Infrastructure Specialist | CIDP 35 Ha YMS &amp; ERP Odoo                    Slide 14 of 15</a:t>
+              <a:t>Armansyah Muchtarrom — Hardware Specialist | Topik 7: ICD &amp; Dry Port Management (CIDP 35 Ha)                    Slide 14 of 15</a:t>
             </a:r>
           </a:p>
         </p:txBody>
@@ -5377,12 +5695,48 @@
                 <a:tableStyleId>{5C22544A-7EE6-4342-B048-85BDC9FD1C3A}</a:tableStyleId>
               </a:tblPr>
               <a:tblGrid>
-                <a:gridCol w="548640"/>
-                <a:gridCol w="2377440"/>
-                <a:gridCol w="2560320"/>
-                <a:gridCol w="1371600"/>
-                <a:gridCol w="1828800"/>
-                <a:gridCol w="2011680"/>
+                <a:gridCol w="548640">
+                  <a:extLst>
+                    <a:ext uri="{9D8B030D-6E8A-4147-A177-3AD203B41FA5}">
+                      <a16:colId xmlns:a16="http://schemas.microsoft.com/office/drawing/2014/main" val="20000"/>
+                    </a:ext>
+                  </a:extLst>
+                </a:gridCol>
+                <a:gridCol w="2377440">
+                  <a:extLst>
+                    <a:ext uri="{9D8B030D-6E8A-4147-A177-3AD203B41FA5}">
+                      <a16:colId xmlns:a16="http://schemas.microsoft.com/office/drawing/2014/main" val="20001"/>
+                    </a:ext>
+                  </a:extLst>
+                </a:gridCol>
+                <a:gridCol w="2560320">
+                  <a:extLst>
+                    <a:ext uri="{9D8B030D-6E8A-4147-A177-3AD203B41FA5}">
+                      <a16:colId xmlns:a16="http://schemas.microsoft.com/office/drawing/2014/main" val="20002"/>
+                    </a:ext>
+                  </a:extLst>
+                </a:gridCol>
+                <a:gridCol w="1371600">
+                  <a:extLst>
+                    <a:ext uri="{9D8B030D-6E8A-4147-A177-3AD203B41FA5}">
+                      <a16:colId xmlns:a16="http://schemas.microsoft.com/office/drawing/2014/main" val="20003"/>
+                    </a:ext>
+                  </a:extLst>
+                </a:gridCol>
+                <a:gridCol w="1828800">
+                  <a:extLst>
+                    <a:ext uri="{9D8B030D-6E8A-4147-A177-3AD203B41FA5}">
+                      <a16:colId xmlns:a16="http://schemas.microsoft.com/office/drawing/2014/main" val="20004"/>
+                    </a:ext>
+                  </a:extLst>
+                </a:gridCol>
+                <a:gridCol w="2011680">
+                  <a:extLst>
+                    <a:ext uri="{9D8B030D-6E8A-4147-A177-3AD203B41FA5}">
+                      <a16:colId xmlns:a16="http://schemas.microsoft.com/office/drawing/2014/main" val="20005"/>
+                    </a:ext>
+                  </a:extLst>
+                </a:gridCol>
               </a:tblGrid>
               <a:tr h="313508">
                 <a:tc>
@@ -5523,6 +5877,11 @@
                     </a:solidFill>
                   </a:tcPr>
                 </a:tc>
+                <a:extLst>
+                  <a:ext uri="{0D108BD9-81ED-4DB2-BD59-A6C34878D82A}">
+                    <a16:rowId xmlns:a16="http://schemas.microsoft.com/office/drawing/2014/main" val="10000"/>
+                  </a:ext>
+                </a:extLst>
               </a:tr>
               <a:tr h="313508">
                 <a:tc>
@@ -5663,6 +6022,11 @@
                     </a:solidFill>
                   </a:tcPr>
                 </a:tc>
+                <a:extLst>
+                  <a:ext uri="{0D108BD9-81ED-4DB2-BD59-A6C34878D82A}">
+                    <a16:rowId xmlns:a16="http://schemas.microsoft.com/office/drawing/2014/main" val="10001"/>
+                  </a:ext>
+                </a:extLst>
               </a:tr>
               <a:tr h="313508">
                 <a:tc>
@@ -5803,6 +6167,11 @@
                     </a:solidFill>
                   </a:tcPr>
                 </a:tc>
+                <a:extLst>
+                  <a:ext uri="{0D108BD9-81ED-4DB2-BD59-A6C34878D82A}">
+                    <a16:rowId xmlns:a16="http://schemas.microsoft.com/office/drawing/2014/main" val="10002"/>
+                  </a:ext>
+                </a:extLst>
               </a:tr>
               <a:tr h="313508">
                 <a:tc>
@@ -5943,6 +6312,11 @@
                     </a:solidFill>
                   </a:tcPr>
                 </a:tc>
+                <a:extLst>
+                  <a:ext uri="{0D108BD9-81ED-4DB2-BD59-A6C34878D82A}">
+                    <a16:rowId xmlns:a16="http://schemas.microsoft.com/office/drawing/2014/main" val="10003"/>
+                  </a:ext>
+                </a:extLst>
               </a:tr>
               <a:tr h="313508">
                 <a:tc>
@@ -6083,6 +6457,11 @@
                     </a:solidFill>
                   </a:tcPr>
                 </a:tc>
+                <a:extLst>
+                  <a:ext uri="{0D108BD9-81ED-4DB2-BD59-A6C34878D82A}">
+                    <a16:rowId xmlns:a16="http://schemas.microsoft.com/office/drawing/2014/main" val="10004"/>
+                  </a:ext>
+                </a:extLst>
               </a:tr>
               <a:tr h="313508">
                 <a:tc>
@@ -6223,6 +6602,11 @@
                     </a:solidFill>
                   </a:tcPr>
                 </a:tc>
+                <a:extLst>
+                  <a:ext uri="{0D108BD9-81ED-4DB2-BD59-A6C34878D82A}">
+                    <a16:rowId xmlns:a16="http://schemas.microsoft.com/office/drawing/2014/main" val="10005"/>
+                  </a:ext>
+                </a:extLst>
               </a:tr>
               <a:tr h="313508">
                 <a:tc>
@@ -6363,6 +6747,11 @@
                     </a:solidFill>
                   </a:tcPr>
                 </a:tc>
+                <a:extLst>
+                  <a:ext uri="{0D108BD9-81ED-4DB2-BD59-A6C34878D82A}">
+                    <a16:rowId xmlns:a16="http://schemas.microsoft.com/office/drawing/2014/main" val="10006"/>
+                  </a:ext>
+                </a:extLst>
               </a:tr>
               <a:tr h="313508">
                 <a:tc>
@@ -6503,6 +6892,11 @@
                     </a:solidFill>
                   </a:tcPr>
                 </a:tc>
+                <a:extLst>
+                  <a:ext uri="{0D108BD9-81ED-4DB2-BD59-A6C34878D82A}">
+                    <a16:rowId xmlns:a16="http://schemas.microsoft.com/office/drawing/2014/main" val="10007"/>
+                  </a:ext>
+                </a:extLst>
               </a:tr>
               <a:tr h="313508">
                 <a:tc>
@@ -6643,6 +7037,11 @@
                     </a:solidFill>
                   </a:tcPr>
                 </a:tc>
+                <a:extLst>
+                  <a:ext uri="{0D108BD9-81ED-4DB2-BD59-A6C34878D82A}">
+                    <a16:rowId xmlns:a16="http://schemas.microsoft.com/office/drawing/2014/main" val="10008"/>
+                  </a:ext>
+                </a:extLst>
               </a:tr>
               <a:tr h="313508">
                 <a:tc>
@@ -6783,6 +7182,11 @@
                     </a:solidFill>
                   </a:tcPr>
                 </a:tc>
+                <a:extLst>
+                  <a:ext uri="{0D108BD9-81ED-4DB2-BD59-A6C34878D82A}">
+                    <a16:rowId xmlns:a16="http://schemas.microsoft.com/office/drawing/2014/main" val="10009"/>
+                  </a:ext>
+                </a:extLst>
               </a:tr>
               <a:tr h="313508">
                 <a:tc>
@@ -6923,6 +7327,11 @@
                     </a:solidFill>
                   </a:tcPr>
                 </a:tc>
+                <a:extLst>
+                  <a:ext uri="{0D108BD9-81ED-4DB2-BD59-A6C34878D82A}">
+                    <a16:rowId xmlns:a16="http://schemas.microsoft.com/office/drawing/2014/main" val="10010"/>
+                  </a:ext>
+                </a:extLst>
               </a:tr>
               <a:tr h="313508">
                 <a:tc>
@@ -7063,6 +7472,11 @@
                     </a:solidFill>
                   </a:tcPr>
                 </a:tc>
+                <a:extLst>
+                  <a:ext uri="{0D108BD9-81ED-4DB2-BD59-A6C34878D82A}">
+                    <a16:rowId xmlns:a16="http://schemas.microsoft.com/office/drawing/2014/main" val="10011"/>
+                  </a:ext>
+                </a:extLst>
               </a:tr>
               <a:tr h="313508">
                 <a:tc>
@@ -7203,6 +7617,11 @@
                     </a:solidFill>
                   </a:tcPr>
                 </a:tc>
+                <a:extLst>
+                  <a:ext uri="{0D108BD9-81ED-4DB2-BD59-A6C34878D82A}">
+                    <a16:rowId xmlns:a16="http://schemas.microsoft.com/office/drawing/2014/main" val="10012"/>
+                  </a:ext>
+                </a:extLst>
               </a:tr>
               <a:tr h="313516">
                 <a:tc>
@@ -7343,6 +7762,11 @@
                     </a:solidFill>
                   </a:tcPr>
                 </a:tc>
+                <a:extLst>
+                  <a:ext uri="{0D108BD9-81ED-4DB2-BD59-A6C34878D82A}">
+                    <a16:rowId xmlns:a16="http://schemas.microsoft.com/office/drawing/2014/main" val="10013"/>
+                  </a:ext>
+                </a:extLst>
               </a:tr>
             </a:tbl>
           </a:graphicData>
@@ -7357,7 +7781,7 @@
 </file>
 
 <file path=ppt/slides/slide15.xml><?xml version="1.0" encoding="utf-8"?>
-<p:sld xmlns:a="http://schemas.openxmlformats.org/drawingml/2006/main" xmlns:p="http://schemas.openxmlformats.org/presentationml/2006/main" xmlns:r="http://schemas.openxmlformats.org/officeDocument/2006/relationships">
+<p:sld xmlns:a="http://schemas.openxmlformats.org/drawingml/2006/main" xmlns:r="http://schemas.openxmlformats.org/officeDocument/2006/relationships" xmlns:p="http://schemas.openxmlformats.org/presentationml/2006/main">
   <p:cSld>
     <p:spTree>
       <p:nvGrpSpPr>
@@ -7365,7 +7789,14 @@
         <p:cNvGrpSpPr/>
         <p:nvPr/>
       </p:nvGrpSpPr>
-      <p:grpSpPr/>
+      <p:grpSpPr>
+        <a:xfrm>
+          <a:off x="0" y="0"/>
+          <a:ext cx="0" cy="0"/>
+          <a:chOff x="0" y="0"/>
+          <a:chExt cx="0" cy="0"/>
+        </a:xfrm>
+      </p:grpSpPr>
       <p:sp>
         <p:nvSpPr>
           <p:cNvPr id="2" name="TextBox 1"/>
@@ -7446,7 +7877,7 @@
               </a:defRPr>
             </a:pPr>
             <a:r>
-              <a:t>Armansyah Muchtarrom — Hardware &amp; Infrastructure Specialist | CIDP 35 Ha YMS &amp; ERP Odoo                    Slide 15 of 15</a:t>
+              <a:t>Armansyah Muchtarrom — Hardware Specialist | Topik 7: ICD &amp; Dry Port Management (CIDP 35 Ha)                    Slide 15 of 15</a:t>
             </a:r>
           </a:p>
         </p:txBody>
@@ -7470,12 +7901,48 @@
                 <a:tableStyleId>{5C22544A-7EE6-4342-B048-85BDC9FD1C3A}</a:tableStyleId>
               </a:tblPr>
               <a:tblGrid>
-                <a:gridCol w="548640"/>
-                <a:gridCol w="2377440"/>
-                <a:gridCol w="2560320"/>
-                <a:gridCol w="1371600"/>
-                <a:gridCol w="1828800"/>
-                <a:gridCol w="2011680"/>
+                <a:gridCol w="548640">
+                  <a:extLst>
+                    <a:ext uri="{9D8B030D-6E8A-4147-A177-3AD203B41FA5}">
+                      <a16:colId xmlns:a16="http://schemas.microsoft.com/office/drawing/2014/main" val="20000"/>
+                    </a:ext>
+                  </a:extLst>
+                </a:gridCol>
+                <a:gridCol w="2377440">
+                  <a:extLst>
+                    <a:ext uri="{9D8B030D-6E8A-4147-A177-3AD203B41FA5}">
+                      <a16:colId xmlns:a16="http://schemas.microsoft.com/office/drawing/2014/main" val="20001"/>
+                    </a:ext>
+                  </a:extLst>
+                </a:gridCol>
+                <a:gridCol w="2560320">
+                  <a:extLst>
+                    <a:ext uri="{9D8B030D-6E8A-4147-A177-3AD203B41FA5}">
+                      <a16:colId xmlns:a16="http://schemas.microsoft.com/office/drawing/2014/main" val="20002"/>
+                    </a:ext>
+                  </a:extLst>
+                </a:gridCol>
+                <a:gridCol w="1371600">
+                  <a:extLst>
+                    <a:ext uri="{9D8B030D-6E8A-4147-A177-3AD203B41FA5}">
+                      <a16:colId xmlns:a16="http://schemas.microsoft.com/office/drawing/2014/main" val="20003"/>
+                    </a:ext>
+                  </a:extLst>
+                </a:gridCol>
+                <a:gridCol w="1828800">
+                  <a:extLst>
+                    <a:ext uri="{9D8B030D-6E8A-4147-A177-3AD203B41FA5}">
+                      <a16:colId xmlns:a16="http://schemas.microsoft.com/office/drawing/2014/main" val="20004"/>
+                    </a:ext>
+                  </a:extLst>
+                </a:gridCol>
+                <a:gridCol w="2011680">
+                  <a:extLst>
+                    <a:ext uri="{9D8B030D-6E8A-4147-A177-3AD203B41FA5}">
+                      <a16:colId xmlns:a16="http://schemas.microsoft.com/office/drawing/2014/main" val="20005"/>
+                    </a:ext>
+                  </a:extLst>
+                </a:gridCol>
               </a:tblGrid>
               <a:tr h="313508">
                 <a:tc>
@@ -7616,6 +8083,11 @@
                     </a:solidFill>
                   </a:tcPr>
                 </a:tc>
+                <a:extLst>
+                  <a:ext uri="{0D108BD9-81ED-4DB2-BD59-A6C34878D82A}">
+                    <a16:rowId xmlns:a16="http://schemas.microsoft.com/office/drawing/2014/main" val="10000"/>
+                  </a:ext>
+                </a:extLst>
               </a:tr>
               <a:tr h="313508">
                 <a:tc>
@@ -7756,6 +8228,11 @@
                     </a:solidFill>
                   </a:tcPr>
                 </a:tc>
+                <a:extLst>
+                  <a:ext uri="{0D108BD9-81ED-4DB2-BD59-A6C34878D82A}">
+                    <a16:rowId xmlns:a16="http://schemas.microsoft.com/office/drawing/2014/main" val="10001"/>
+                  </a:ext>
+                </a:extLst>
               </a:tr>
               <a:tr h="313508">
                 <a:tc>
@@ -7896,6 +8373,11 @@
                     </a:solidFill>
                   </a:tcPr>
                 </a:tc>
+                <a:extLst>
+                  <a:ext uri="{0D108BD9-81ED-4DB2-BD59-A6C34878D82A}">
+                    <a16:rowId xmlns:a16="http://schemas.microsoft.com/office/drawing/2014/main" val="10002"/>
+                  </a:ext>
+                </a:extLst>
               </a:tr>
               <a:tr h="313508">
                 <a:tc>
@@ -8036,6 +8518,11 @@
                     </a:solidFill>
                   </a:tcPr>
                 </a:tc>
+                <a:extLst>
+                  <a:ext uri="{0D108BD9-81ED-4DB2-BD59-A6C34878D82A}">
+                    <a16:rowId xmlns:a16="http://schemas.microsoft.com/office/drawing/2014/main" val="10003"/>
+                  </a:ext>
+                </a:extLst>
               </a:tr>
               <a:tr h="313508">
                 <a:tc>
@@ -8176,6 +8663,11 @@
                     </a:solidFill>
                   </a:tcPr>
                 </a:tc>
+                <a:extLst>
+                  <a:ext uri="{0D108BD9-81ED-4DB2-BD59-A6C34878D82A}">
+                    <a16:rowId xmlns:a16="http://schemas.microsoft.com/office/drawing/2014/main" val="10004"/>
+                  </a:ext>
+                </a:extLst>
               </a:tr>
               <a:tr h="313508">
                 <a:tc>
@@ -8316,6 +8808,11 @@
                     </a:solidFill>
                   </a:tcPr>
                 </a:tc>
+                <a:extLst>
+                  <a:ext uri="{0D108BD9-81ED-4DB2-BD59-A6C34878D82A}">
+                    <a16:rowId xmlns:a16="http://schemas.microsoft.com/office/drawing/2014/main" val="10005"/>
+                  </a:ext>
+                </a:extLst>
               </a:tr>
               <a:tr h="313508">
                 <a:tc>
@@ -8456,6 +8953,11 @@
                     </a:solidFill>
                   </a:tcPr>
                 </a:tc>
+                <a:extLst>
+                  <a:ext uri="{0D108BD9-81ED-4DB2-BD59-A6C34878D82A}">
+                    <a16:rowId xmlns:a16="http://schemas.microsoft.com/office/drawing/2014/main" val="10006"/>
+                  </a:ext>
+                </a:extLst>
               </a:tr>
               <a:tr h="313508">
                 <a:tc>
@@ -8596,6 +9098,11 @@
                     </a:solidFill>
                   </a:tcPr>
                 </a:tc>
+                <a:extLst>
+                  <a:ext uri="{0D108BD9-81ED-4DB2-BD59-A6C34878D82A}">
+                    <a16:rowId xmlns:a16="http://schemas.microsoft.com/office/drawing/2014/main" val="10007"/>
+                  </a:ext>
+                </a:extLst>
               </a:tr>
               <a:tr h="313508">
                 <a:tc>
@@ -8736,6 +9243,11 @@
                     </a:solidFill>
                   </a:tcPr>
                 </a:tc>
+                <a:extLst>
+                  <a:ext uri="{0D108BD9-81ED-4DB2-BD59-A6C34878D82A}">
+                    <a16:rowId xmlns:a16="http://schemas.microsoft.com/office/drawing/2014/main" val="10008"/>
+                  </a:ext>
+                </a:extLst>
               </a:tr>
               <a:tr h="313508">
                 <a:tc>
@@ -8876,6 +9388,11 @@
                     </a:solidFill>
                   </a:tcPr>
                 </a:tc>
+                <a:extLst>
+                  <a:ext uri="{0D108BD9-81ED-4DB2-BD59-A6C34878D82A}">
+                    <a16:rowId xmlns:a16="http://schemas.microsoft.com/office/drawing/2014/main" val="10009"/>
+                  </a:ext>
+                </a:extLst>
               </a:tr>
               <a:tr h="313508">
                 <a:tc>
@@ -9016,6 +9533,11 @@
                     </a:solidFill>
                   </a:tcPr>
                 </a:tc>
+                <a:extLst>
+                  <a:ext uri="{0D108BD9-81ED-4DB2-BD59-A6C34878D82A}">
+                    <a16:rowId xmlns:a16="http://schemas.microsoft.com/office/drawing/2014/main" val="10010"/>
+                  </a:ext>
+                </a:extLst>
               </a:tr>
               <a:tr h="313508">
                 <a:tc>
@@ -9156,6 +9678,11 @@
                     </a:solidFill>
                   </a:tcPr>
                 </a:tc>
+                <a:extLst>
+                  <a:ext uri="{0D108BD9-81ED-4DB2-BD59-A6C34878D82A}">
+                    <a16:rowId xmlns:a16="http://schemas.microsoft.com/office/drawing/2014/main" val="10011"/>
+                  </a:ext>
+                </a:extLst>
               </a:tr>
               <a:tr h="313508">
                 <a:tc>
@@ -9296,6 +9823,11 @@
                     </a:solidFill>
                   </a:tcPr>
                 </a:tc>
+                <a:extLst>
+                  <a:ext uri="{0D108BD9-81ED-4DB2-BD59-A6C34878D82A}">
+                    <a16:rowId xmlns:a16="http://schemas.microsoft.com/office/drawing/2014/main" val="10012"/>
+                  </a:ext>
+                </a:extLst>
               </a:tr>
               <a:tr h="313516">
                 <a:tc>
@@ -9436,6 +9968,11 @@
                     </a:solidFill>
                   </a:tcPr>
                 </a:tc>
+                <a:extLst>
+                  <a:ext uri="{0D108BD9-81ED-4DB2-BD59-A6C34878D82A}">
+                    <a16:rowId xmlns:a16="http://schemas.microsoft.com/office/drawing/2014/main" val="10013"/>
+                  </a:ext>
+                </a:extLst>
               </a:tr>
             </a:tbl>
           </a:graphicData>
@@ -9450,7 +9987,7 @@
 </file>
 
 <file path=ppt/slides/slide2.xml><?xml version="1.0" encoding="utf-8"?>
-<p:sld xmlns:a="http://schemas.openxmlformats.org/drawingml/2006/main" xmlns:p="http://schemas.openxmlformats.org/presentationml/2006/main" xmlns:r="http://schemas.openxmlformats.org/officeDocument/2006/relationships">
+<p:sld xmlns:a="http://schemas.openxmlformats.org/drawingml/2006/main" xmlns:r="http://schemas.openxmlformats.org/officeDocument/2006/relationships" xmlns:p="http://schemas.openxmlformats.org/presentationml/2006/main">
   <p:cSld>
     <p:spTree>
       <p:nvGrpSpPr>
@@ -9458,7 +9995,14 @@
         <p:cNvGrpSpPr/>
         <p:nvPr/>
       </p:nvGrpSpPr>
-      <p:grpSpPr/>
+      <p:grpSpPr>
+        <a:xfrm>
+          <a:off x="0" y="0"/>
+          <a:ext cx="0" cy="0"/>
+          <a:chOff x="0" y="0"/>
+          <a:chExt cx="0" cy="0"/>
+        </a:xfrm>
+      </p:grpSpPr>
       <p:sp>
         <p:nvSpPr>
           <p:cNvPr id="2" name="TextBox 1"/>
@@ -9489,7 +10033,8 @@
               </a:defRPr>
             </a:pPr>
             <a:r>
-              <a:t>CONCLUSION INTERMODAL DRY PORT (CIDP) 35 HA</a:t>
+              <a:rPr dirty="0"/>
+              <a:t>TOPIK 7: INLAND CONTAINER DEPOT (ICD) &amp; DRY PORT MANAGEMENT</a:t>
             </a:r>
           </a:p>
           <a:p>
@@ -9504,7 +10049,36 @@
               </a:defRPr>
             </a:pPr>
             <a:r>
-              <a:t>Filosofi Arsitektur: Mengapa Validasi Menggunakan Postman &amp; JSON?</a:t>
+              <a:rPr dirty="0" err="1"/>
+              <a:t>Lanskap</a:t>
+            </a:r>
+            <a:r>
+              <a:rPr dirty="0"/>
+              <a:t> </a:t>
+            </a:r>
+            <a:r>
+              <a:rPr dirty="0" err="1"/>
+              <a:t>Ekosistem</a:t>
+            </a:r>
+            <a:r>
+              <a:rPr dirty="0"/>
+              <a:t> Hardware: 6 </a:t>
+            </a:r>
+            <a:r>
+              <a:rPr dirty="0" err="1"/>
+              <a:t>Klaster</a:t>
+            </a:r>
+            <a:r>
+              <a:rPr dirty="0"/>
+              <a:t> </a:t>
+            </a:r>
+            <a:r>
+              <a:rPr dirty="0" err="1"/>
+              <a:t>Operasional</a:t>
+            </a:r>
+            <a:r>
+              <a:rPr dirty="0"/>
+              <a:t> Terminal 35 Ha</a:t>
             </a:r>
           </a:p>
         </p:txBody>
@@ -9539,7 +10113,7 @@
               </a:defRPr>
             </a:pPr>
             <a:r>
-              <a:t>Armansyah Muchtarrom — Hardware &amp; Infrastructure Specialist | CIDP 35 Ha YMS &amp; ERP Odoo                    Slide 2 of 15</a:t>
+              <a:t>Armansyah Muchtarrom — Hardware Specialist | Topik 7: ICD &amp; Dry Port Management (CIDP 35 Ha)                    Slide 2 of 15</a:t>
             </a:r>
           </a:p>
         </p:txBody>
@@ -9586,6 +10160,7 @@
           <a:lstStyle/>
           <a:p>
             <a:pPr algn="ctr"/>
+            <a:endParaRPr/>
           </a:p>
         </p:txBody>
       </p:sp>
@@ -9612,14 +10187,15 @@
           <a:lstStyle/>
           <a:p>
             <a:pPr>
-              <a:defRPr sz="1200" b="1">
+              <a:defRPr sz="1100" b="1">
                 <a:solidFill>
                   <a:srgbClr val="0170B9"/>
                 </a:solidFill>
               </a:defRPr>
             </a:pPr>
             <a:r>
-              <a:t>LAYER 1: SENSOR FISIK</a:t>
+              <a:rPr dirty="0"/>
+              <a:t>TANTANGAN FISIK LAPANGAN</a:t>
             </a:r>
           </a:p>
           <a:p>
@@ -9627,49 +10203,293 @@
               <a:spcBef>
                 <a:spcPts val="400"/>
               </a:spcBef>
-              <a:defRPr sz="1400" b="1">
+              <a:defRPr sz="1300" b="1">
                 <a:solidFill>
                   <a:srgbClr val="002F5E"/>
                 </a:solidFill>
               </a:defRPr>
             </a:pPr>
             <a:r>
-              <a:t>Menangkap Pemicu Lapangan</a:t>
+              <a:rPr dirty="0" err="1"/>
+              <a:t>Standar</a:t>
+            </a:r>
+            <a:r>
+              <a:rPr dirty="0"/>
+              <a:t> Maritim &amp; Heavy-Duty</a:t>
             </a:r>
           </a:p>
           <a:p>
             <a:pPr>
               <a:spcBef>
-                <a:spcPts val="1000"/>
+                <a:spcPts val="800"/>
               </a:spcBef>
-              <a:defRPr sz="1050">
+              <a:defRPr sz="1000">
                 <a:solidFill>
                   <a:srgbClr val="1E293B"/>
                 </a:solidFill>
               </a:defRPr>
             </a:pPr>
             <a:r>
-              <a:t>• Induction loop mendeteksi massa truk.</a:t>
-            </a:r>
-            <a:br/>
-            <a:r>
-              <a:t>• Photocell memicu kamera OCR portal.</a:t>
-            </a:r>
-            <a:br/>
-            <a:r>
-              <a:t>• Load cell 80t membaca bobot kotor.</a:t>
-            </a:r>
-            <a:br/>
-            <a:r>
-              <a:t>• RTK GNSS membaca satelit &lt; 2 cm.</a:t>
-            </a:r>
-            <a:br/>
-            <a:r>
-              <a:t>• Twistlock spreader mendeteksi jepitan box.</a:t>
-            </a:r>
-            <a:br/>
-            <a:r>
-              <a:t>• Current Transformer membaca ampere reefer.</a:t>
+              <a:rPr dirty="0"/>
+              <a:t>• Luas area 35 Ha </a:t>
+            </a:r>
+            <a:r>
+              <a:rPr dirty="0" err="1"/>
+              <a:t>dengan</a:t>
+            </a:r>
+            <a:r>
+              <a:rPr dirty="0"/>
+              <a:t> </a:t>
+            </a:r>
+            <a:r>
+              <a:rPr dirty="0" err="1"/>
+              <a:t>manuver</a:t>
+            </a:r>
+            <a:r>
+              <a:rPr dirty="0"/>
+              <a:t> rutin </a:t>
+            </a:r>
+            <a:r>
+              <a:rPr dirty="0" err="1"/>
+              <a:t>truk</a:t>
+            </a:r>
+            <a:r>
+              <a:rPr dirty="0"/>
+              <a:t> trailer 40ft &amp; Reach Stacker 45 ton.</a:t>
+            </a:r>
+            <a:br>
+              <a:rPr dirty="0"/>
+            </a:br>
+            <a:r>
+              <a:rPr dirty="0"/>
+              <a:t>• </a:t>
+            </a:r>
+            <a:r>
+              <a:rPr dirty="0" err="1"/>
+              <a:t>Operasi</a:t>
+            </a:r>
+            <a:r>
+              <a:rPr dirty="0"/>
+              <a:t> 24/7 non-stop di </a:t>
+            </a:r>
+            <a:r>
+              <a:rPr dirty="0" err="1"/>
+              <a:t>bawah</a:t>
+            </a:r>
+            <a:r>
+              <a:rPr dirty="0"/>
+              <a:t> </a:t>
+            </a:r>
+            <a:r>
+              <a:rPr dirty="0" err="1"/>
+              <a:t>terik</a:t>
+            </a:r>
+            <a:r>
+              <a:rPr dirty="0"/>
+              <a:t> </a:t>
+            </a:r>
+            <a:r>
+              <a:rPr dirty="0" err="1"/>
+              <a:t>matahari</a:t>
+            </a:r>
+            <a:r>
+              <a:rPr dirty="0"/>
+              <a:t>, </a:t>
+            </a:r>
+            <a:r>
+              <a:rPr dirty="0" err="1"/>
+              <a:t>debu</a:t>
+            </a:r>
+            <a:r>
+              <a:rPr dirty="0"/>
+              <a:t> semen/</a:t>
+            </a:r>
+            <a:r>
+              <a:rPr dirty="0" err="1"/>
+              <a:t>kontainer</a:t>
+            </a:r>
+            <a:r>
+              <a:rPr dirty="0"/>
+              <a:t>, &amp; </a:t>
+            </a:r>
+            <a:r>
+              <a:rPr dirty="0" err="1"/>
+              <a:t>kelembapan</a:t>
+            </a:r>
+            <a:r>
+              <a:rPr dirty="0"/>
+              <a:t> </a:t>
+            </a:r>
+            <a:r>
+              <a:rPr dirty="0" err="1"/>
+              <a:t>tinggi</a:t>
+            </a:r>
+            <a:r>
+              <a:rPr dirty="0"/>
+              <a:t>.</a:t>
+            </a:r>
+            <a:br>
+              <a:rPr dirty="0"/>
+            </a:br>
+            <a:r>
+              <a:rPr dirty="0"/>
+              <a:t>• </a:t>
+            </a:r>
+            <a:r>
+              <a:rPr dirty="0" err="1"/>
+              <a:t>Kebutuhan</a:t>
+            </a:r>
+            <a:r>
+              <a:rPr dirty="0"/>
+              <a:t> </a:t>
+            </a:r>
+            <a:r>
+              <a:rPr dirty="0" err="1"/>
+              <a:t>Proteksi</a:t>
+            </a:r>
+            <a:r>
+              <a:rPr dirty="0"/>
+              <a:t> </a:t>
+            </a:r>
+            <a:r>
+              <a:rPr dirty="0" err="1"/>
+              <a:t>Industri</a:t>
+            </a:r>
+            <a:r>
+              <a:rPr dirty="0"/>
+              <a:t>:</a:t>
+            </a:r>
+            <a:br>
+              <a:rPr dirty="0"/>
+            </a:br>
+            <a:r>
+              <a:rPr dirty="0"/>
+              <a:t>  - </a:t>
+            </a:r>
+            <a:r>
+              <a:rPr dirty="0" err="1"/>
+              <a:t>Bodi</a:t>
+            </a:r>
+            <a:r>
+              <a:rPr dirty="0"/>
+              <a:t> </a:t>
+            </a:r>
+            <a:r>
+              <a:rPr dirty="0" err="1"/>
+              <a:t>tahan</a:t>
+            </a:r>
+            <a:r>
+              <a:rPr dirty="0"/>
+              <a:t> </a:t>
+            </a:r>
+            <a:r>
+              <a:rPr dirty="0" err="1"/>
+              <a:t>cuaca</a:t>
+            </a:r>
+            <a:r>
+              <a:rPr dirty="0"/>
+              <a:t> &amp; air: IP67 / IP68.</a:t>
+            </a:r>
+            <a:br>
+              <a:rPr dirty="0"/>
+            </a:br>
+            <a:r>
+              <a:rPr dirty="0"/>
+              <a:t>  - </a:t>
+            </a:r>
+            <a:r>
+              <a:rPr dirty="0" err="1"/>
+              <a:t>Komputer</a:t>
+            </a:r>
+            <a:r>
+              <a:rPr dirty="0"/>
+              <a:t> </a:t>
+            </a:r>
+            <a:r>
+              <a:rPr dirty="0" err="1"/>
+              <a:t>tanpa</a:t>
+            </a:r>
+            <a:r>
+              <a:rPr dirty="0"/>
+              <a:t> </a:t>
+            </a:r>
+            <a:r>
+              <a:rPr dirty="0" err="1"/>
+              <a:t>kipas</a:t>
+            </a:r>
+            <a:r>
+              <a:rPr dirty="0"/>
+              <a:t> (</a:t>
+            </a:r>
+            <a:r>
+              <a:rPr dirty="0" err="1"/>
+              <a:t>Fanless</a:t>
+            </a:r>
+            <a:r>
+              <a:rPr dirty="0"/>
+              <a:t> Industrial PC).</a:t>
+            </a:r>
+            <a:br>
+              <a:rPr dirty="0"/>
+            </a:br>
+            <a:r>
+              <a:rPr dirty="0"/>
+              <a:t>  - </a:t>
+            </a:r>
+            <a:r>
+              <a:rPr dirty="0" err="1"/>
+              <a:t>Tahan</a:t>
+            </a:r>
+            <a:r>
+              <a:rPr dirty="0"/>
+              <a:t> </a:t>
+            </a:r>
+            <a:r>
+              <a:rPr dirty="0" err="1"/>
+              <a:t>getaran</a:t>
+            </a:r>
+            <a:r>
+              <a:rPr dirty="0"/>
+              <a:t> </a:t>
+            </a:r>
+            <a:r>
+              <a:rPr dirty="0" err="1"/>
+              <a:t>guncangan</a:t>
+            </a:r>
+            <a:r>
+              <a:rPr dirty="0"/>
+              <a:t>: MIL-STD-810G.</a:t>
+            </a:r>
+            <a:br>
+              <a:rPr dirty="0"/>
+            </a:br>
+            <a:r>
+              <a:rPr dirty="0"/>
+              <a:t>  - </a:t>
+            </a:r>
+            <a:r>
+              <a:rPr dirty="0" err="1"/>
+              <a:t>Standar</a:t>
+            </a:r>
+            <a:r>
+              <a:rPr dirty="0"/>
+              <a:t> </a:t>
+            </a:r>
+            <a:r>
+              <a:rPr dirty="0" err="1"/>
+              <a:t>keselamatan</a:t>
+            </a:r>
+            <a:r>
+              <a:rPr dirty="0"/>
+              <a:t> </a:t>
+            </a:r>
+            <a:r>
+              <a:rPr dirty="0" err="1"/>
+              <a:t>rel</a:t>
+            </a:r>
+            <a:r>
+              <a:rPr dirty="0"/>
+              <a:t> KA: SIL 4.</a:t>
             </a:r>
           </a:p>
         </p:txBody>
@@ -9716,6 +10536,7 @@
           <a:lstStyle/>
           <a:p>
             <a:pPr algn="ctr"/>
+            <a:endParaRPr/>
           </a:p>
         </p:txBody>
       </p:sp>
@@ -9727,7 +10548,7 @@
         </p:nvSpPr>
         <p:spPr>
           <a:xfrm>
-            <a:off x="4572000" y="1828800"/>
+            <a:off x="4587240" y="1828800"/>
             <a:ext cx="3017520" cy="4023360"/>
           </a:xfrm>
           <a:prstGeom prst="rect">
@@ -9742,14 +10563,14 @@
           <a:lstStyle/>
           <a:p>
             <a:pPr>
-              <a:defRPr sz="1200" b="1">
+              <a:defRPr sz="1100" b="1">
                 <a:solidFill>
                   <a:srgbClr val="0170B9"/>
                 </a:solidFill>
               </a:defRPr>
             </a:pPr>
             <a:r>
-              <a:t>LAYER 2: EDGE AI PC &amp; YMS</a:t>
+              <a:t>SEBARAN 26 HARDWARE</a:t>
             </a:r>
           </a:p>
           <a:p>
@@ -9757,45 +10578,49 @@
               <a:spcBef>
                 <a:spcPts val="400"/>
               </a:spcBef>
-              <a:defRPr sz="1400" b="1">
+              <a:defRPr sz="1300" b="1">
                 <a:solidFill>
                   <a:srgbClr val="002F5E"/>
                 </a:solidFill>
               </a:defRPr>
             </a:pPr>
             <a:r>
-              <a:t>Penerjemah &amp; Pengendali Lokal</a:t>
+              <a:t>6 Klaster Kritis Lapangan</a:t>
             </a:r>
           </a:p>
           <a:p>
             <a:pPr>
               <a:spcBef>
-                <a:spcPts val="1000"/>
+                <a:spcPts val="800"/>
               </a:spcBef>
-              <a:defRPr sz="1050">
+              <a:defRPr sz="950">
                 <a:solidFill>
                   <a:srgbClr val="1E293B"/>
                 </a:solidFill>
               </a:defRPr>
             </a:pPr>
             <a:r>
-              <a:t>• Advantech ARK-3532 Fanless memproses data serial/LAN secara lokal (28 detik).</a:t>
+              <a:t>1. Otomasi Gate (8 Item): ANPR, OCR, Timbangan 80t, RFID, Barrier, LED, Edge PC.</a:t>
             </a:r>
             <a:br/>
             <a:r>
-              <a:t>• Mengonversi sinyal fisik menjadi REST API JSON.</a:t>
+              <a:t>2. Yard &amp; Alat Angkat (4 Item): DGPS RTK, Twistlock Spreader, VMT, Rugged PDA.</a:t>
             </a:r>
             <a:br/>
             <a:r>
-              <a:t>• Mengendalikan relay buka barrier gate.</a:t>
+              <a:t>3. Cold Chain (2 Item): Smart Socket 380V &amp; Thermal Camera.</a:t>
             </a:r>
             <a:br/>
             <a:r>
-              <a:t>• Mengalokasikan 3D slot Bay-Row-Tier di YMS.</a:t>
+              <a:t>4. Rail Siding (3 Item): Axle Counter, AP WiFi 7, GPS Truk.</a:t>
             </a:r>
             <a:br/>
             <a:r>
-              <a:t>• Mengapa Postman? Karena data contract JSON di Postman 100% identik dengan output Edge PC!</a:t>
+              <a:t>5. Bea Cukai (5 Item): Gantry X-Ray 6 MeV, Smart E-Seal, CCTV.</a:t>
+            </a:r>
+            <a:br/>
+            <a:r>
+              <a:t>6. Core IT (4 Item): Datacenter, Switch PoE+, Online UPS.</a:t>
             </a:r>
           </a:p>
         </p:txBody>
@@ -9842,6 +10667,7 @@
           <a:lstStyle/>
           <a:p>
             <a:pPr algn="ctr"/>
+            <a:endParaRPr/>
           </a:p>
         </p:txBody>
       </p:sp>
@@ -9868,14 +10694,14 @@
           <a:lstStyle/>
           <a:p>
             <a:pPr>
-              <a:defRPr sz="1200" b="1">
+              <a:defRPr sz="1100" b="1">
                 <a:solidFill>
                   <a:srgbClr val="10B981"/>
                 </a:solidFill>
               </a:defRPr>
             </a:pPr>
             <a:r>
-              <a:t>LAYER 3: ERP ODOO</a:t>
+              <a:t>STRATEGI KONSULTAN</a:t>
             </a:r>
           </a:p>
           <a:p>
@@ -9883,45 +10709,53 @@
               <a:spcBef>
                 <a:spcPts val="400"/>
               </a:spcBef>
-              <a:defRPr sz="1400" b="1">
+              <a:defRPr sz="1300" b="1">
                 <a:solidFill>
                   <a:srgbClr val="002F5E"/>
                 </a:solidFill>
               </a:defRPr>
             </a:pPr>
             <a:r>
-              <a:t>Rekonsiliasi Finansial &amp; Aset</a:t>
+              <a:t>Rasionalisasi Menuju Slide 3</a:t>
             </a:r>
           </a:p>
           <a:p>
             <a:pPr>
               <a:spcBef>
-                <a:spcPts val="1000"/>
+                <a:spcPts val="800"/>
               </a:spcBef>
-              <a:defRPr sz="1050">
+              <a:defRPr sz="1000">
                 <a:solidFill>
                   <a:srgbClr val="1E293B"/>
                 </a:solidFill>
               </a:defRPr>
             </a:pPr>
             <a:r>
-              <a:t>• Menerima Webhook Billable Charge Events dari YMS secara otomatis.</a:t>
+              <a:t>• Tidak Semua Hardware Bekerja Sama:</a:t>
             </a:r>
             <a:br/>
             <a:r>
-              <a:t>• Odoo Invoicing: Menerbitkan draf faktur VGM (Rp 50rb), Lo-Lo (Rp 250rb), Reefer (Rp 250rb).</a:t>
+              <a:t>  - Ada perangkat aktif penghasil data transaksi telemetri dinamis.</a:t>
             </a:r>
             <a:br/>
             <a:r>
-              <a:t>• Odoo Maintenance: Melacak jam jalan alat berat.</a:t>
+              <a:t>  - Ada perangkat infrastruktur pasif sebagai pendukung fasilitas fisik.</a:t>
             </a:r>
             <a:br/>
             <a:r>
-              <a:t>• Odoo Inventory: Mengunci izin rilis DO jika segel Bea Cukai belum aman.</a:t>
+              <a:t>• Efisiensi Anggaran (CAPEX Rp 18,94 M):</a:t>
             </a:r>
             <a:br/>
             <a:r>
-              <a:t>• Hasil: Zero Revenue Leakage!</a:t>
+              <a:t>  Pengadaan dirancang berbasis prioritas otomasi &amp; kepatuhan regulasi.</a:t>
+            </a:r>
+            <a:br/>
+            <a:r>
+              <a:t>• Jembatan Implementasi:</a:t>
+            </a:r>
+            <a:br/>
+            <a:r>
+              <a:t>  Diperlukan pemisahan tegas antara hardware yang disimulasikan alur datanya vs hardware blueprint fisik.</a:t>
             </a:r>
           </a:p>
         </p:txBody>
@@ -9935,7 +10769,7 @@
 </file>
 
 <file path=ppt/slides/slide3.xml><?xml version="1.0" encoding="utf-8"?>
-<p:sld xmlns:a="http://schemas.openxmlformats.org/drawingml/2006/main" xmlns:p="http://schemas.openxmlformats.org/presentationml/2006/main" xmlns:r="http://schemas.openxmlformats.org/officeDocument/2006/relationships">
+<p:sld xmlns:a="http://schemas.openxmlformats.org/drawingml/2006/main" xmlns:r="http://schemas.openxmlformats.org/officeDocument/2006/relationships" xmlns:p="http://schemas.openxmlformats.org/presentationml/2006/main">
   <p:cSld>
     <p:spTree>
       <p:nvGrpSpPr>
@@ -9943,7 +10777,14 @@
         <p:cNvGrpSpPr/>
         <p:nvPr/>
       </p:nvGrpSpPr>
-      <p:grpSpPr/>
+      <p:grpSpPr>
+        <a:xfrm>
+          <a:off x="0" y="0"/>
+          <a:ext cx="0" cy="0"/>
+          <a:chOff x="0" y="0"/>
+          <a:chExt cx="0" cy="0"/>
+        </a:xfrm>
+      </p:grpSpPr>
       <p:sp>
         <p:nvSpPr>
           <p:cNvPr id="2" name="TextBox 1"/>
@@ -9974,7 +10815,8 @@
               </a:defRPr>
             </a:pPr>
             <a:r>
-              <a:t>CONCLUSION INTERMODAL DRY PORT (CIDP) 35 HA</a:t>
+              <a:rPr dirty="0"/>
+              <a:t>TOPIK 7: INLAND CONTAINER DEPOT (ICD) &amp; DRY PORT MANAGEMENT</a:t>
             </a:r>
           </a:p>
           <a:p>
@@ -9989,7 +10831,40 @@
               </a:defRPr>
             </a:pPr>
             <a:r>
-              <a:t>Strategi Klasifikasi: 11 Perangkat Simulasi vs 15 Perangkat Blueprint</a:t>
+              <a:rPr dirty="0"/>
+              <a:t>Strategi </a:t>
+            </a:r>
+            <a:r>
+              <a:rPr dirty="0" err="1"/>
+              <a:t>Klasifikasi</a:t>
+            </a:r>
+            <a:r>
+              <a:rPr dirty="0"/>
+              <a:t>: 11 </a:t>
+            </a:r>
+            <a:r>
+              <a:rPr dirty="0" err="1"/>
+              <a:t>Perangkat</a:t>
+            </a:r>
+            <a:r>
+              <a:rPr dirty="0"/>
+              <a:t> </a:t>
+            </a:r>
+            <a:r>
+              <a:rPr dirty="0" err="1"/>
+              <a:t>Simulasi</a:t>
+            </a:r>
+            <a:r>
+              <a:rPr dirty="0"/>
+              <a:t> vs 15 </a:t>
+            </a:r>
+            <a:r>
+              <a:rPr dirty="0" err="1"/>
+              <a:t>Perangkat</a:t>
+            </a:r>
+            <a:r>
+              <a:rPr dirty="0"/>
+              <a:t> Blueprint</a:t>
             </a:r>
           </a:p>
         </p:txBody>
@@ -10024,7 +10899,7 @@
               </a:defRPr>
             </a:pPr>
             <a:r>
-              <a:t>Armansyah Muchtarrom — Hardware &amp; Infrastructure Specialist | CIDP 35 Ha YMS &amp; ERP Odoo                    Slide 3 of 15</a:t>
+              <a:t>Armansyah Muchtarrom — Hardware Specialist | Topik 7: ICD &amp; Dry Port Management (CIDP 35 Ha)                    Slide 3 of 15</a:t>
             </a:r>
           </a:p>
         </p:txBody>
@@ -10071,6 +10946,7 @@
           <a:lstStyle/>
           <a:p>
             <a:pPr algn="ctr"/>
+            <a:endParaRPr/>
           </a:p>
         </p:txBody>
       </p:sp>
@@ -10221,6 +11097,7 @@
           <a:lstStyle/>
           <a:p>
             <a:pPr algn="ctr"/>
+            <a:endParaRPr/>
           </a:p>
         </p:txBody>
       </p:sp>
@@ -10354,7 +11231,7 @@
 </file>
 
 <file path=ppt/slides/slide4.xml><?xml version="1.0" encoding="utf-8"?>
-<p:sld xmlns:a="http://schemas.openxmlformats.org/drawingml/2006/main" xmlns:p="http://schemas.openxmlformats.org/presentationml/2006/main" xmlns:r="http://schemas.openxmlformats.org/officeDocument/2006/relationships">
+<p:sld xmlns:a="http://schemas.openxmlformats.org/drawingml/2006/main" xmlns:r="http://schemas.openxmlformats.org/officeDocument/2006/relationships" xmlns:p="http://schemas.openxmlformats.org/presentationml/2006/main">
   <p:cSld>
     <p:spTree>
       <p:nvGrpSpPr>
@@ -10362,7 +11239,14 @@
         <p:cNvGrpSpPr/>
         <p:nvPr/>
       </p:nvGrpSpPr>
-      <p:grpSpPr/>
+      <p:grpSpPr>
+        <a:xfrm>
+          <a:off x="0" y="0"/>
+          <a:ext cx="0" cy="0"/>
+          <a:chOff x="0" y="0"/>
+          <a:chExt cx="0" cy="0"/>
+        </a:xfrm>
+      </p:grpSpPr>
       <p:sp>
         <p:nvSpPr>
           <p:cNvPr id="2" name="TextBox 1"/>
@@ -10393,7 +11277,7 @@
               </a:defRPr>
             </a:pPr>
             <a:r>
-              <a:t>CONCLUSION INTERMODAL DRY PORT (CIDP) 35 HA</a:t>
+              <a:t>TOPIK 7: INLAND CONTAINER DEPOT (ICD) &amp; DRY PORT MANAGEMENT</a:t>
             </a:r>
           </a:p>
           <a:p>
@@ -10443,7 +11327,7 @@
               </a:defRPr>
             </a:pPr>
             <a:r>
-              <a:t>Armansyah Muchtarrom — Hardware &amp; Infrastructure Specialist | CIDP 35 Ha YMS &amp; ERP Odoo                    Slide 4 of 15</a:t>
+              <a:t>Armansyah Muchtarrom — Hardware Specialist | Topik 7: ICD &amp; Dry Port Management (CIDP 35 Ha)                    Slide 4 of 15</a:t>
             </a:r>
           </a:p>
         </p:txBody>
@@ -10490,6 +11374,7 @@
           <a:lstStyle/>
           <a:p>
             <a:pPr algn="ctr"/>
+            <a:endParaRPr/>
           </a:p>
         </p:txBody>
       </p:sp>
@@ -10600,6 +11485,7 @@
           <a:lstStyle/>
           <a:p>
             <a:pPr algn="ctr"/>
+            <a:endParaRPr/>
           </a:p>
         </p:txBody>
       </p:sp>
@@ -10710,6 +11596,7 @@
           <a:lstStyle/>
           <a:p>
             <a:pPr algn="ctr"/>
+            <a:endParaRPr/>
           </a:p>
         </p:txBody>
       </p:sp>
@@ -10820,6 +11707,7 @@
           <a:lstStyle/>
           <a:p>
             <a:pPr algn="ctr"/>
+            <a:endParaRPr/>
           </a:p>
         </p:txBody>
       </p:sp>
@@ -10930,6 +11818,7 @@
           <a:lstStyle/>
           <a:p>
             <a:pPr algn="ctr"/>
+            <a:endParaRPr/>
           </a:p>
         </p:txBody>
       </p:sp>
@@ -11007,7 +11896,7 @@
 </file>
 
 <file path=ppt/slides/slide5.xml><?xml version="1.0" encoding="utf-8"?>
-<p:sld xmlns:a="http://schemas.openxmlformats.org/drawingml/2006/main" xmlns:p="http://schemas.openxmlformats.org/presentationml/2006/main" xmlns:r="http://schemas.openxmlformats.org/officeDocument/2006/relationships">
+<p:sld xmlns:a="http://schemas.openxmlformats.org/drawingml/2006/main" xmlns:r="http://schemas.openxmlformats.org/officeDocument/2006/relationships" xmlns:p="http://schemas.openxmlformats.org/presentationml/2006/main">
   <p:cSld>
     <p:spTree>
       <p:nvGrpSpPr>
@@ -11015,7 +11904,14 @@
         <p:cNvGrpSpPr/>
         <p:nvPr/>
       </p:nvGrpSpPr>
-      <p:grpSpPr/>
+      <p:grpSpPr>
+        <a:xfrm>
+          <a:off x="0" y="0"/>
+          <a:ext cx="0" cy="0"/>
+          <a:chOff x="0" y="0"/>
+          <a:chExt cx="0" cy="0"/>
+        </a:xfrm>
+      </p:grpSpPr>
       <p:sp>
         <p:nvSpPr>
           <p:cNvPr id="2" name="TextBox 1"/>
@@ -11046,7 +11942,7 @@
               </a:defRPr>
             </a:pPr>
             <a:r>
-              <a:t>CONCLUSION INTERMODAL DRY PORT (CIDP) 35 HA</a:t>
+              <a:t>TOPIK 7: INLAND CONTAINER DEPOT (ICD) &amp; DRY PORT MANAGEMENT</a:t>
             </a:r>
           </a:p>
           <a:p>
@@ -11096,7 +11992,7 @@
               </a:defRPr>
             </a:pPr>
             <a:r>
-              <a:t>Armansyah Muchtarrom — Hardware &amp; Infrastructure Specialist | CIDP 35 Ha YMS &amp; ERP Odoo                    Slide 5 of 15</a:t>
+              <a:t>Armansyah Muchtarrom — Hardware Specialist | Topik 7: ICD &amp; Dry Port Management (CIDP 35 Ha)                    Slide 5 of 15</a:t>
             </a:r>
           </a:p>
         </p:txBody>
@@ -11143,6 +12039,7 @@
           <a:lstStyle/>
           <a:p>
             <a:pPr algn="ctr"/>
+            <a:endParaRPr/>
           </a:p>
         </p:txBody>
       </p:sp>
@@ -11269,6 +12166,7 @@
           <a:lstStyle/>
           <a:p>
             <a:pPr algn="ctr"/>
+            <a:endParaRPr/>
           </a:p>
         </p:txBody>
       </p:sp>
@@ -11395,6 +12293,7 @@
           <a:lstStyle/>
           <a:p>
             <a:pPr algn="ctr"/>
+            <a:endParaRPr/>
           </a:p>
         </p:txBody>
       </p:sp>
@@ -11484,7 +12383,7 @@
 </file>
 
 <file path=ppt/slides/slide6.xml><?xml version="1.0" encoding="utf-8"?>
-<p:sld xmlns:a="http://schemas.openxmlformats.org/drawingml/2006/main" xmlns:p="http://schemas.openxmlformats.org/presentationml/2006/main" xmlns:r="http://schemas.openxmlformats.org/officeDocument/2006/relationships">
+<p:sld xmlns:a="http://schemas.openxmlformats.org/drawingml/2006/main" xmlns:r="http://schemas.openxmlformats.org/officeDocument/2006/relationships" xmlns:p="http://schemas.openxmlformats.org/presentationml/2006/main">
   <p:cSld>
     <p:spTree>
       <p:nvGrpSpPr>
@@ -11492,7 +12391,14 @@
         <p:cNvGrpSpPr/>
         <p:nvPr/>
       </p:nvGrpSpPr>
-      <p:grpSpPr/>
+      <p:grpSpPr>
+        <a:xfrm>
+          <a:off x="0" y="0"/>
+          <a:ext cx="0" cy="0"/>
+          <a:chOff x="0" y="0"/>
+          <a:chExt cx="0" cy="0"/>
+        </a:xfrm>
+      </p:grpSpPr>
       <p:sp>
         <p:nvSpPr>
           <p:cNvPr id="2" name="TextBox 1"/>
@@ -11523,7 +12429,7 @@
               </a:defRPr>
             </a:pPr>
             <a:r>
-              <a:t>CONCLUSION INTERMODAL DRY PORT (CIDP) 35 HA</a:t>
+              <a:t>TOPIK 7: INLAND CONTAINER DEPOT (ICD) &amp; DRY PORT MANAGEMENT</a:t>
             </a:r>
           </a:p>
           <a:p>
@@ -11573,7 +12479,7 @@
               </a:defRPr>
             </a:pPr>
             <a:r>
-              <a:t>Armansyah Muchtarrom — Hardware &amp; Infrastructure Specialist | CIDP 35 Ha YMS &amp; ERP Odoo                    Slide 6 of 15</a:t>
+              <a:t>Armansyah Muchtarrom — Hardware Specialist | Topik 7: ICD &amp; Dry Port Management (CIDP 35 Ha)                    Slide 6 of 15</a:t>
             </a:r>
           </a:p>
         </p:txBody>
@@ -11620,6 +12526,7 @@
           <a:lstStyle/>
           <a:p>
             <a:pPr algn="ctr"/>
+            <a:endParaRPr/>
           </a:p>
         </p:txBody>
       </p:sp>
@@ -11742,6 +12649,7 @@
           <a:lstStyle/>
           <a:p>
             <a:pPr algn="ctr"/>
+            <a:endParaRPr/>
           </a:p>
         </p:txBody>
       </p:sp>
@@ -11868,6 +12776,7 @@
           <a:lstStyle/>
           <a:p>
             <a:pPr algn="ctr"/>
+            <a:endParaRPr/>
           </a:p>
         </p:txBody>
       </p:sp>
@@ -11957,7 +12866,7 @@
 </file>
 
 <file path=ppt/slides/slide7.xml><?xml version="1.0" encoding="utf-8"?>
-<p:sld xmlns:a="http://schemas.openxmlformats.org/drawingml/2006/main" xmlns:p="http://schemas.openxmlformats.org/presentationml/2006/main" xmlns:r="http://schemas.openxmlformats.org/officeDocument/2006/relationships">
+<p:sld xmlns:a="http://schemas.openxmlformats.org/drawingml/2006/main" xmlns:r="http://schemas.openxmlformats.org/officeDocument/2006/relationships" xmlns:p="http://schemas.openxmlformats.org/presentationml/2006/main">
   <p:cSld>
     <p:spTree>
       <p:nvGrpSpPr>
@@ -11965,7 +12874,14 @@
         <p:cNvGrpSpPr/>
         <p:nvPr/>
       </p:nvGrpSpPr>
-      <p:grpSpPr/>
+      <p:grpSpPr>
+        <a:xfrm>
+          <a:off x="0" y="0"/>
+          <a:ext cx="0" cy="0"/>
+          <a:chOff x="0" y="0"/>
+          <a:chExt cx="0" cy="0"/>
+        </a:xfrm>
+      </p:grpSpPr>
       <p:sp>
         <p:nvSpPr>
           <p:cNvPr id="2" name="TextBox 1"/>
@@ -11996,7 +12912,7 @@
               </a:defRPr>
             </a:pPr>
             <a:r>
-              <a:t>CONCLUSION INTERMODAL DRY PORT (CIDP) 35 HA</a:t>
+              <a:t>TOPIK 7: INLAND CONTAINER DEPOT (ICD) &amp; DRY PORT MANAGEMENT</a:t>
             </a:r>
           </a:p>
           <a:p>
@@ -12046,7 +12962,7 @@
               </a:defRPr>
             </a:pPr>
             <a:r>
-              <a:t>Armansyah Muchtarrom — Hardware &amp; Infrastructure Specialist | CIDP 35 Ha YMS &amp; ERP Odoo                    Slide 7 of 15</a:t>
+              <a:t>Armansyah Muchtarrom — Hardware Specialist | Topik 7: ICD &amp; Dry Port Management (CIDP 35 Ha)                    Slide 7 of 15</a:t>
             </a:r>
           </a:p>
         </p:txBody>
@@ -12070,12 +12986,48 @@
                 <a:tableStyleId>{5C22544A-7EE6-4342-B048-85BDC9FD1C3A}</a:tableStyleId>
               </a:tblPr>
               <a:tblGrid>
-                <a:gridCol w="2103120"/>
-                <a:gridCol w="1280160"/>
-                <a:gridCol w="1645920"/>
-                <a:gridCol w="2103120"/>
-                <a:gridCol w="1828800"/>
-                <a:gridCol w="1737360"/>
+                <a:gridCol w="2103120">
+                  <a:extLst>
+                    <a:ext uri="{9D8B030D-6E8A-4147-A177-3AD203B41FA5}">
+                      <a16:colId xmlns:a16="http://schemas.microsoft.com/office/drawing/2014/main" val="20000"/>
+                    </a:ext>
+                  </a:extLst>
+                </a:gridCol>
+                <a:gridCol w="1280160">
+                  <a:extLst>
+                    <a:ext uri="{9D8B030D-6E8A-4147-A177-3AD203B41FA5}">
+                      <a16:colId xmlns:a16="http://schemas.microsoft.com/office/drawing/2014/main" val="20001"/>
+                    </a:ext>
+                  </a:extLst>
+                </a:gridCol>
+                <a:gridCol w="1645920">
+                  <a:extLst>
+                    <a:ext uri="{9D8B030D-6E8A-4147-A177-3AD203B41FA5}">
+                      <a16:colId xmlns:a16="http://schemas.microsoft.com/office/drawing/2014/main" val="20002"/>
+                    </a:ext>
+                  </a:extLst>
+                </a:gridCol>
+                <a:gridCol w="2103120">
+                  <a:extLst>
+                    <a:ext uri="{9D8B030D-6E8A-4147-A177-3AD203B41FA5}">
+                      <a16:colId xmlns:a16="http://schemas.microsoft.com/office/drawing/2014/main" val="20003"/>
+                    </a:ext>
+                  </a:extLst>
+                </a:gridCol>
+                <a:gridCol w="1828800">
+                  <a:extLst>
+                    <a:ext uri="{9D8B030D-6E8A-4147-A177-3AD203B41FA5}">
+                      <a16:colId xmlns:a16="http://schemas.microsoft.com/office/drawing/2014/main" val="20004"/>
+                    </a:ext>
+                  </a:extLst>
+                </a:gridCol>
+                <a:gridCol w="1737360">
+                  <a:extLst>
+                    <a:ext uri="{9D8B030D-6E8A-4147-A177-3AD203B41FA5}">
+                      <a16:colId xmlns:a16="http://schemas.microsoft.com/office/drawing/2014/main" val="20005"/>
+                    </a:ext>
+                  </a:extLst>
+                </a:gridCol>
               </a:tblGrid>
               <a:tr h="399010">
                 <a:tc>
@@ -12216,6 +13168,11 @@
                     </a:solidFill>
                   </a:tcPr>
                 </a:tc>
+                <a:extLst>
+                  <a:ext uri="{0D108BD9-81ED-4DB2-BD59-A6C34878D82A}">
+                    <a16:rowId xmlns:a16="http://schemas.microsoft.com/office/drawing/2014/main" val="10000"/>
+                  </a:ext>
+                </a:extLst>
               </a:tr>
               <a:tr h="399010">
                 <a:tc>
@@ -12356,6 +13313,11 @@
                     </a:solidFill>
                   </a:tcPr>
                 </a:tc>
+                <a:extLst>
+                  <a:ext uri="{0D108BD9-81ED-4DB2-BD59-A6C34878D82A}">
+                    <a16:rowId xmlns:a16="http://schemas.microsoft.com/office/drawing/2014/main" val="10001"/>
+                  </a:ext>
+                </a:extLst>
               </a:tr>
               <a:tr h="399010">
                 <a:tc>
@@ -12496,6 +13458,11 @@
                     </a:solidFill>
                   </a:tcPr>
                 </a:tc>
+                <a:extLst>
+                  <a:ext uri="{0D108BD9-81ED-4DB2-BD59-A6C34878D82A}">
+                    <a16:rowId xmlns:a16="http://schemas.microsoft.com/office/drawing/2014/main" val="10002"/>
+                  </a:ext>
+                </a:extLst>
               </a:tr>
               <a:tr h="399010">
                 <a:tc>
@@ -12636,6 +13603,11 @@
                     </a:solidFill>
                   </a:tcPr>
                 </a:tc>
+                <a:extLst>
+                  <a:ext uri="{0D108BD9-81ED-4DB2-BD59-A6C34878D82A}">
+                    <a16:rowId xmlns:a16="http://schemas.microsoft.com/office/drawing/2014/main" val="10003"/>
+                  </a:ext>
+                </a:extLst>
               </a:tr>
               <a:tr h="399010">
                 <a:tc>
@@ -12776,6 +13748,11 @@
                     </a:solidFill>
                   </a:tcPr>
                 </a:tc>
+                <a:extLst>
+                  <a:ext uri="{0D108BD9-81ED-4DB2-BD59-A6C34878D82A}">
+                    <a16:rowId xmlns:a16="http://schemas.microsoft.com/office/drawing/2014/main" val="10004"/>
+                  </a:ext>
+                </a:extLst>
               </a:tr>
               <a:tr h="399010">
                 <a:tc>
@@ -12916,6 +13893,11 @@
                     </a:solidFill>
                   </a:tcPr>
                 </a:tc>
+                <a:extLst>
+                  <a:ext uri="{0D108BD9-81ED-4DB2-BD59-A6C34878D82A}">
+                    <a16:rowId xmlns:a16="http://schemas.microsoft.com/office/drawing/2014/main" val="10005"/>
+                  </a:ext>
+                </a:extLst>
               </a:tr>
               <a:tr h="399010">
                 <a:tc>
@@ -13056,6 +14038,11 @@
                     </a:solidFill>
                   </a:tcPr>
                 </a:tc>
+                <a:extLst>
+                  <a:ext uri="{0D108BD9-81ED-4DB2-BD59-A6C34878D82A}">
+                    <a16:rowId xmlns:a16="http://schemas.microsoft.com/office/drawing/2014/main" val="10006"/>
+                  </a:ext>
+                </a:extLst>
               </a:tr>
               <a:tr h="399010">
                 <a:tc>
@@ -13196,6 +14183,11 @@
                     </a:solidFill>
                   </a:tcPr>
                 </a:tc>
+                <a:extLst>
+                  <a:ext uri="{0D108BD9-81ED-4DB2-BD59-A6C34878D82A}">
+                    <a16:rowId xmlns:a16="http://schemas.microsoft.com/office/drawing/2014/main" val="10007"/>
+                  </a:ext>
+                </a:extLst>
               </a:tr>
               <a:tr h="399010">
                 <a:tc>
@@ -13336,6 +14328,11 @@
                     </a:solidFill>
                   </a:tcPr>
                 </a:tc>
+                <a:extLst>
+                  <a:ext uri="{0D108BD9-81ED-4DB2-BD59-A6C34878D82A}">
+                    <a16:rowId xmlns:a16="http://schemas.microsoft.com/office/drawing/2014/main" val="10008"/>
+                  </a:ext>
+                </a:extLst>
               </a:tr>
               <a:tr h="399010">
                 <a:tc>
@@ -13476,6 +14473,11 @@
                     </a:solidFill>
                   </a:tcPr>
                 </a:tc>
+                <a:extLst>
+                  <a:ext uri="{0D108BD9-81ED-4DB2-BD59-A6C34878D82A}">
+                    <a16:rowId xmlns:a16="http://schemas.microsoft.com/office/drawing/2014/main" val="10009"/>
+                  </a:ext>
+                </a:extLst>
               </a:tr>
               <a:tr h="399020">
                 <a:tc>
@@ -13616,6 +14618,11 @@
                     </a:solidFill>
                   </a:tcPr>
                 </a:tc>
+                <a:extLst>
+                  <a:ext uri="{0D108BD9-81ED-4DB2-BD59-A6C34878D82A}">
+                    <a16:rowId xmlns:a16="http://schemas.microsoft.com/office/drawing/2014/main" val="10010"/>
+                  </a:ext>
+                </a:extLst>
               </a:tr>
             </a:tbl>
           </a:graphicData>
@@ -13630,7 +14637,7 @@
 </file>
 
 <file path=ppt/slides/slide8.xml><?xml version="1.0" encoding="utf-8"?>
-<p:sld xmlns:a="http://schemas.openxmlformats.org/drawingml/2006/main" xmlns:p="http://schemas.openxmlformats.org/presentationml/2006/main" xmlns:r="http://schemas.openxmlformats.org/officeDocument/2006/relationships">
+<p:sld xmlns:a="http://schemas.openxmlformats.org/drawingml/2006/main" xmlns:r="http://schemas.openxmlformats.org/officeDocument/2006/relationships" xmlns:p="http://schemas.openxmlformats.org/presentationml/2006/main">
   <p:cSld>
     <p:spTree>
       <p:nvGrpSpPr>
@@ -13638,7 +14645,14 @@
         <p:cNvGrpSpPr/>
         <p:nvPr/>
       </p:nvGrpSpPr>
-      <p:grpSpPr/>
+      <p:grpSpPr>
+        <a:xfrm>
+          <a:off x="0" y="0"/>
+          <a:ext cx="0" cy="0"/>
+          <a:chOff x="0" y="0"/>
+          <a:chExt cx="0" cy="0"/>
+        </a:xfrm>
+      </p:grpSpPr>
       <p:sp>
         <p:nvSpPr>
           <p:cNvPr id="2" name="TextBox 1"/>
@@ -13669,7 +14683,7 @@
               </a:defRPr>
             </a:pPr>
             <a:r>
-              <a:t>CONCLUSION INTERMODAL DRY PORT (CIDP) 35 HA</a:t>
+              <a:t>TOPIK 7: INLAND CONTAINER DEPOT (ICD) &amp; DRY PORT MANAGEMENT</a:t>
             </a:r>
           </a:p>
           <a:p>
@@ -13719,7 +14733,7 @@
               </a:defRPr>
             </a:pPr>
             <a:r>
-              <a:t>Armansyah Muchtarrom — Hardware &amp; Infrastructure Specialist | CIDP 35 Ha YMS &amp; ERP Odoo                    Slide 8 of 15</a:t>
+              <a:t>Armansyah Muchtarrom — Hardware Specialist | Topik 7: ICD &amp; Dry Port Management (CIDP 35 Ha)                    Slide 8 of 15</a:t>
             </a:r>
           </a:p>
         </p:txBody>
@@ -13766,6 +14780,7 @@
           <a:lstStyle/>
           <a:p>
             <a:pPr algn="ctr"/>
+            <a:endParaRPr/>
           </a:p>
         </p:txBody>
       </p:sp>
@@ -13923,6 +14938,7 @@
           <a:lstStyle/>
           <a:p>
             <a:pPr algn="ctr"/>
+            <a:endParaRPr/>
           </a:p>
         </p:txBody>
       </p:sp>
@@ -14071,7 +15087,7 @@
 </file>
 
 <file path=ppt/slides/slide9.xml><?xml version="1.0" encoding="utf-8"?>
-<p:sld xmlns:a="http://schemas.openxmlformats.org/drawingml/2006/main" xmlns:p="http://schemas.openxmlformats.org/presentationml/2006/main" xmlns:r="http://schemas.openxmlformats.org/officeDocument/2006/relationships">
+<p:sld xmlns:a="http://schemas.openxmlformats.org/drawingml/2006/main" xmlns:r="http://schemas.openxmlformats.org/officeDocument/2006/relationships" xmlns:p="http://schemas.openxmlformats.org/presentationml/2006/main">
   <p:cSld>
     <p:spTree>
       <p:nvGrpSpPr>
@@ -14079,7 +15095,14 @@
         <p:cNvGrpSpPr/>
         <p:nvPr/>
       </p:nvGrpSpPr>
-      <p:grpSpPr/>
+      <p:grpSpPr>
+        <a:xfrm>
+          <a:off x="0" y="0"/>
+          <a:ext cx="0" cy="0"/>
+          <a:chOff x="0" y="0"/>
+          <a:chExt cx="0" cy="0"/>
+        </a:xfrm>
+      </p:grpSpPr>
       <p:sp>
         <p:nvSpPr>
           <p:cNvPr id="2" name="TextBox 1"/>
@@ -14110,7 +15133,7 @@
               </a:defRPr>
             </a:pPr>
             <a:r>
-              <a:t>CONCLUSION INTERMODAL DRY PORT (CIDP) 35 HA</a:t>
+              <a:t>TOPIK 7: INLAND CONTAINER DEPOT (ICD) &amp; DRY PORT MANAGEMENT</a:t>
             </a:r>
           </a:p>
           <a:p>
@@ -14160,7 +15183,7 @@
               </a:defRPr>
             </a:pPr>
             <a:r>
-              <a:t>Armansyah Muchtarrom — Hardware &amp; Infrastructure Specialist | CIDP 35 Ha YMS &amp; ERP Odoo                    Slide 9 of 15</a:t>
+              <a:t>Armansyah Muchtarrom — Hardware Specialist | Topik 7: ICD &amp; Dry Port Management (CIDP 35 Ha)                    Slide 9 of 15</a:t>
             </a:r>
           </a:p>
         </p:txBody>
@@ -14184,12 +15207,48 @@
                 <a:tableStyleId>{5C22544A-7EE6-4342-B048-85BDC9FD1C3A}</a:tableStyleId>
               </a:tblPr>
               <a:tblGrid>
-                <a:gridCol w="731520"/>
-                <a:gridCol w="3474720"/>
-                <a:gridCol w="1463040"/>
-                <a:gridCol w="1645920"/>
-                <a:gridCol w="2011680"/>
-                <a:gridCol w="1371600"/>
+                <a:gridCol w="731520">
+                  <a:extLst>
+                    <a:ext uri="{9D8B030D-6E8A-4147-A177-3AD203B41FA5}">
+                      <a16:colId xmlns:a16="http://schemas.microsoft.com/office/drawing/2014/main" val="20000"/>
+                    </a:ext>
+                  </a:extLst>
+                </a:gridCol>
+                <a:gridCol w="3474720">
+                  <a:extLst>
+                    <a:ext uri="{9D8B030D-6E8A-4147-A177-3AD203B41FA5}">
+                      <a16:colId xmlns:a16="http://schemas.microsoft.com/office/drawing/2014/main" val="20001"/>
+                    </a:ext>
+                  </a:extLst>
+                </a:gridCol>
+                <a:gridCol w="1463040">
+                  <a:extLst>
+                    <a:ext uri="{9D8B030D-6E8A-4147-A177-3AD203B41FA5}">
+                      <a16:colId xmlns:a16="http://schemas.microsoft.com/office/drawing/2014/main" val="20002"/>
+                    </a:ext>
+                  </a:extLst>
+                </a:gridCol>
+                <a:gridCol w="1645920">
+                  <a:extLst>
+                    <a:ext uri="{9D8B030D-6E8A-4147-A177-3AD203B41FA5}">
+                      <a16:colId xmlns:a16="http://schemas.microsoft.com/office/drawing/2014/main" val="20003"/>
+                    </a:ext>
+                  </a:extLst>
+                </a:gridCol>
+                <a:gridCol w="2011680">
+                  <a:extLst>
+                    <a:ext uri="{9D8B030D-6E8A-4147-A177-3AD203B41FA5}">
+                      <a16:colId xmlns:a16="http://schemas.microsoft.com/office/drawing/2014/main" val="20004"/>
+                    </a:ext>
+                  </a:extLst>
+                </a:gridCol>
+                <a:gridCol w="1371600">
+                  <a:extLst>
+                    <a:ext uri="{9D8B030D-6E8A-4147-A177-3AD203B41FA5}">
+                      <a16:colId xmlns:a16="http://schemas.microsoft.com/office/drawing/2014/main" val="20005"/>
+                    </a:ext>
+                  </a:extLst>
+                </a:gridCol>
               </a:tblGrid>
               <a:tr h="514350">
                 <a:tc>
@@ -14330,6 +15389,11 @@
                     </a:solidFill>
                   </a:tcPr>
                 </a:tc>
+                <a:extLst>
+                  <a:ext uri="{0D108BD9-81ED-4DB2-BD59-A6C34878D82A}">
+                    <a16:rowId xmlns:a16="http://schemas.microsoft.com/office/drawing/2014/main" val="10000"/>
+                  </a:ext>
+                </a:extLst>
               </a:tr>
               <a:tr h="514350">
                 <a:tc>
@@ -14470,6 +15534,11 @@
                     </a:solidFill>
                   </a:tcPr>
                 </a:tc>
+                <a:extLst>
+                  <a:ext uri="{0D108BD9-81ED-4DB2-BD59-A6C34878D82A}">
+                    <a16:rowId xmlns:a16="http://schemas.microsoft.com/office/drawing/2014/main" val="10001"/>
+                  </a:ext>
+                </a:extLst>
               </a:tr>
               <a:tr h="514350">
                 <a:tc>
@@ -14610,6 +15679,11 @@
                     </a:solidFill>
                   </a:tcPr>
                 </a:tc>
+                <a:extLst>
+                  <a:ext uri="{0D108BD9-81ED-4DB2-BD59-A6C34878D82A}">
+                    <a16:rowId xmlns:a16="http://schemas.microsoft.com/office/drawing/2014/main" val="10002"/>
+                  </a:ext>
+                </a:extLst>
               </a:tr>
               <a:tr h="514350">
                 <a:tc>
@@ -14750,6 +15824,11 @@
                     </a:solidFill>
                   </a:tcPr>
                 </a:tc>
+                <a:extLst>
+                  <a:ext uri="{0D108BD9-81ED-4DB2-BD59-A6C34878D82A}">
+                    <a16:rowId xmlns:a16="http://schemas.microsoft.com/office/drawing/2014/main" val="10003"/>
+                  </a:ext>
+                </a:extLst>
               </a:tr>
               <a:tr h="514350">
                 <a:tc>
@@ -14890,6 +15969,11 @@
                     </a:solidFill>
                   </a:tcPr>
                 </a:tc>
+                <a:extLst>
+                  <a:ext uri="{0D108BD9-81ED-4DB2-BD59-A6C34878D82A}">
+                    <a16:rowId xmlns:a16="http://schemas.microsoft.com/office/drawing/2014/main" val="10004"/>
+                  </a:ext>
+                </a:extLst>
               </a:tr>
               <a:tr h="514350">
                 <a:tc>
@@ -15030,6 +16114,11 @@
                     </a:solidFill>
                   </a:tcPr>
                 </a:tc>
+                <a:extLst>
+                  <a:ext uri="{0D108BD9-81ED-4DB2-BD59-A6C34878D82A}">
+                    <a16:rowId xmlns:a16="http://schemas.microsoft.com/office/drawing/2014/main" val="10005"/>
+                  </a:ext>
+                </a:extLst>
               </a:tr>
               <a:tr h="514350">
                 <a:tc>
@@ -15170,6 +16259,11 @@
                     </a:solidFill>
                   </a:tcPr>
                 </a:tc>
+                <a:extLst>
+                  <a:ext uri="{0D108BD9-81ED-4DB2-BD59-A6C34878D82A}">
+                    <a16:rowId xmlns:a16="http://schemas.microsoft.com/office/drawing/2014/main" val="10006"/>
+                  </a:ext>
+                </a:extLst>
               </a:tr>
               <a:tr h="514350">
                 <a:tc>
@@ -15310,6 +16404,11 @@
                     </a:solidFill>
                   </a:tcPr>
                 </a:tc>
+                <a:extLst>
+                  <a:ext uri="{0D108BD9-81ED-4DB2-BD59-A6C34878D82A}">
+                    <a16:rowId xmlns:a16="http://schemas.microsoft.com/office/drawing/2014/main" val="10007"/>
+                  </a:ext>
+                </a:extLst>
               </a:tr>
             </a:tbl>
           </a:graphicData>
